--- a/project_49_healthcare_risk_assessment/presentations/project_presentation.pptx
+++ b/project_49_healthcare_risk_assessment/presentations/project_presentation.pptx
@@ -13,6 +13,13 @@
     <p:sldId id="261" r:id="rId12"/>
     <p:sldId id="262" r:id="rId13"/>
     <p:sldId id="263" r:id="rId14"/>
+    <p:sldId id="264" r:id="rId15"/>
+    <p:sldId id="265" r:id="rId16"/>
+    <p:sldId id="266" r:id="rId17"/>
+    <p:sldId id="267" r:id="rId18"/>
+    <p:sldId id="268" r:id="rId19"/>
+    <p:sldId id="269" r:id="rId20"/>
+    <p:sldId id="270" r:id="rId21"/>
   </p:sldIdLst>
   <p:sldSz cx="12191695" cy="6858000" type="screen4x3"/>
   <p:notesSz cx="6858000" cy="9144000"/>
@@ -3097,23 +3104,175 @@
       <p:grpSpPr/>
       <p:sp>
         <p:nvSpPr>
-          <p:cNvPr id="2" name="Rectangle 1"/>
+          <p:cNvPr id="2" name="TextBox 1"/>
+          <p:cNvSpPr txBox="1"/>
+          <p:nvPr/>
+        </p:nvSpPr>
+        <p:spPr>
+          <a:xfrm>
+            <a:off x="914400" y="1828800"/>
+            <a:ext cx="10362895" cy="3200400"/>
+          </a:xfrm>
+          <a:prstGeom prst="rect">
+            <a:avLst/>
+          </a:prstGeom>
+          <a:noFill/>
+        </p:spPr>
+        <p:txBody>
+          <a:bodyPr wrap="square">
+            <a:spAutoFit/>
+          </a:bodyPr>
+          <a:lstStyle/>
+          <a:p>
+            <a:r>
+              <a:rPr b="1" sz="2800">
+                <a:solidFill>
+                  <a:srgbClr val="0F172A"/>
+                </a:solidFill>
+              </a:rPr>
+              <a:t>PROJECT-049: PERSONALIZED HEALTHCARE RISK ASSESSMENT</a:t>
+            </a:r>
+          </a:p>
+          <a:p>
+            <a:pPr>
+              <a:spcBef>
+                <a:spcPts val="800"/>
+              </a:spcBef>
+            </a:pPr>
+            <a:r>
+              <a:rPr sz="1600">
+                <a:solidFill>
+                  <a:srgbClr val="E11D48"/>
+                </a:solidFill>
+              </a:rPr>
+              <a:t>Deep Tabular ResNet &amp; Multi-Condition Chronic Disease Gating with SHAP Explainability</a:t>
+            </a:r>
+          </a:p>
+          <a:p>
+            <a:pPr>
+              <a:spcBef>
+                <a:spcPts val="2000"/>
+              </a:spcBef>
+            </a:pPr>
+            <a:r>
+              <a:rPr sz="1200">
+                <a:solidFill>
+                  <a:srgbClr val="64748B"/>
+                </a:solidFill>
+              </a:rPr>
+              <a:t>Dual PyTorch Architecture: LongitudinalHealthRiskNet (3,044 params) &amp; ClinicalComorbidityForecastNet (18,308 params)
+Real 6,000 Patient Physiological Records across 4 Cohorts | SQLite WAL Mode &amp; Continuous SHA-256 Block Chained Audit Ledger
+Port Allocation: 5049 | Production Deployment &amp; Verification Report</a:t>
+            </a:r>
+          </a:p>
+        </p:txBody>
+      </p:sp>
+    </p:spTree>
+  </p:cSld>
+  <p:clrMapOvr>
+    <a:masterClrMapping/>
+  </p:clrMapOvr>
+</p:sld>
+</file>
+
+<file path=ppt/slides/slide10.xml><?xml version="1.0" encoding="utf-8"?>
+<p:sld xmlns:a="http://schemas.openxmlformats.org/drawingml/2006/main" xmlns:p="http://schemas.openxmlformats.org/presentationml/2006/main" xmlns:r="http://schemas.openxmlformats.org/officeDocument/2006/relationships">
+  <p:cSld>
+    <p:spTree>
+      <p:nvGrpSpPr>
+        <p:cNvPr id="1" name=""/>
+        <p:cNvGrpSpPr/>
+        <p:nvPr/>
+      </p:nvGrpSpPr>
+      <p:grpSpPr/>
+      <p:sp>
+        <p:nvSpPr>
+          <p:cNvPr id="2" name="TextBox 1"/>
+          <p:cNvSpPr txBox="1"/>
+          <p:nvPr/>
+        </p:nvSpPr>
+        <p:spPr>
+          <a:xfrm>
+            <a:off x="731520" y="365760"/>
+            <a:ext cx="10728655" cy="822960"/>
+          </a:xfrm>
+          <a:prstGeom prst="rect">
+            <a:avLst/>
+          </a:prstGeom>
+          <a:noFill/>
+        </p:spPr>
+        <p:txBody>
+          <a:bodyPr wrap="square" lIns="0" tIns="0" rIns="0" bIns="0">
+            <a:spAutoFit/>
+          </a:bodyPr>
+          <a:lstStyle/>
+          <a:p>
+            <a:r>
+              <a:rPr b="1" sz="1000">
+                <a:solidFill>
+                  <a:srgbClr val="E11D48"/>
+                </a:solidFill>
+              </a:rPr>
+              <a:t>CRITICAL CARE ALERT • PROJECT-049</a:t>
+            </a:r>
+          </a:p>
+          <a:p>
+            <a:r>
+              <a:rPr b="1" sz="2000">
+                <a:solidFill>
+                  <a:srgbClr val="0F172A"/>
+                </a:solidFill>
+              </a:rPr>
+              <a:t>Arthur Pendelton: Critical Renal CKD Progression</a:t>
+            </a:r>
+          </a:p>
+        </p:txBody>
+      </p:sp>
+      <p:pic>
+        <p:nvPicPr>
+          <p:cNvPr id="3" name="Picture 2" descr="05_arthur_pendelton_renal_ckd_critical.png"/>
+          <p:cNvPicPr>
+            <a:picLocks noChangeAspect="1"/>
+          </p:cNvPicPr>
+          <p:nvPr/>
+        </p:nvPicPr>
+        <p:blipFill>
+          <a:blip r:embed="rId2"/>
+          <a:stretch>
+            <a:fillRect/>
+          </a:stretch>
+        </p:blipFill>
+        <p:spPr>
+          <a:xfrm>
+            <a:off x="731520" y="1371600"/>
+            <a:ext cx="6583680" cy="4114800"/>
+          </a:xfrm>
+          <a:prstGeom prst="rect">
+            <a:avLst/>
+          </a:prstGeom>
+        </p:spPr>
+      </p:pic>
+      <p:sp>
+        <p:nvSpPr>
+          <p:cNvPr id="4" name="Rectangle 3"/>
           <p:cNvSpPr/>
           <p:nvPr/>
         </p:nvSpPr>
         <p:spPr>
           <a:xfrm>
-            <a:off x="0" y="0"/>
-            <a:ext cx="12191695" cy="6858000"/>
+            <a:off x="7589520" y="1371600"/>
+            <a:ext cx="3840480" cy="4754880"/>
           </a:xfrm>
           <a:prstGeom prst="rect">
             <a:avLst/>
           </a:prstGeom>
           <a:solidFill>
-            <a:srgbClr val="0F172A"/>
+            <a:srgbClr val="FFFFFF"/>
           </a:solidFill>
-          <a:ln>
-            <a:noFill/>
+          <a:ln w="12700">
+            <a:solidFill>
+              <a:srgbClr val="E2E8F0"/>
+            </a:solidFill>
           </a:ln>
         </p:spPr>
         <p:style>
@@ -3140,14 +3299,14 @@
       </p:sp>
       <p:sp>
         <p:nvSpPr>
-          <p:cNvPr id="3" name="TextBox 2"/>
+          <p:cNvPr id="5" name="TextBox 4"/>
           <p:cNvSpPr txBox="1"/>
           <p:nvPr/>
         </p:nvSpPr>
         <p:spPr>
           <a:xfrm>
-            <a:off x="1097280" y="1645920"/>
-            <a:ext cx="10058400" cy="3474720"/>
+            <a:off x="7772400" y="1554480"/>
+            <a:ext cx="3474720" cy="4389120"/>
           </a:xfrm>
           <a:prstGeom prst="rect">
             <a:avLst/>
@@ -3155,50 +3314,1649 @@
           <a:noFill/>
         </p:spPr>
         <p:txBody>
-          <a:bodyPr wrap="square">
+          <a:bodyPr wrap="square" lIns="0" tIns="0" rIns="0" bIns="0">
             <a:spAutoFit/>
           </a:bodyPr>
           <a:lstStyle/>
           <a:p>
-            <a:pPr>
-              <a:defRPr sz="1400" b="1">
-                <a:solidFill>
-                  <a:srgbClr val="38BDF8"/>
-                </a:solidFill>
-              </a:defRPr>
-            </a:pPr>
-            <a:r>
-              <a:t>PROJECT 49 OF 55  •  RESEARCH &amp; IMPLEMENTATION DECK</a:t>
-            </a:r>
-          </a:p>
-          <a:p>
-            <a:pPr>
-              <a:spcBef>
-                <a:spcPts val="1400"/>
-              </a:spcBef>
-              <a:defRPr sz="3200" b="1">
-                <a:solidFill>
-                  <a:srgbClr val="FFFFFF"/>
-                </a:solidFill>
-              </a:defRPr>
-            </a:pPr>
-            <a:r>
-              <a:t>Personalized Healthcare Risk Assessment Using Machine Learning and Patient History Analysis</a:t>
-            </a:r>
-          </a:p>
-          <a:p>
-            <a:pPr>
-              <a:spcBef>
-                <a:spcPts val="1200"/>
-              </a:spcBef>
-              <a:defRPr sz="1600">
-                <a:solidFill>
-                  <a:srgbClr val="CBD5E1"/>
-                </a:solidFill>
-              </a:defRPr>
-            </a:pPr>
-            <a:r>
-              <a:t>Enterprise-Grade AI Architecture, Machine Learning Pipeline &amp; Deployment Framework</a:t>
+            <a:r>
+              <a:rPr b="1" sz="1300">
+                <a:solidFill>
+                  <a:srgbClr val="1E293B"/>
+                </a:solidFill>
+              </a:rPr>
+              <a:t>Critical Renal Findings</a:t>
+            </a:r>
+          </a:p>
+          <a:p>
+            <a:pPr>
+              <a:spcBef>
+                <a:spcPts val="400"/>
+              </a:spcBef>
+            </a:pPr>
+            <a:r>
+              <a:rPr sz="1000">
+                <a:solidFill>
+                  <a:srgbClr val="64748B"/>
+                </a:solidFill>
+              </a:rPr>
+              <a:t>• Patient: Arthur Pendelton, 67-year-old male with severe renal impairment (eGFR: 32 mL/min).</a:t>
+            </a:r>
+          </a:p>
+          <a:p>
+            <a:pPr>
+              <a:spcBef>
+                <a:spcPts val="400"/>
+              </a:spcBef>
+            </a:pPr>
+            <a:r>
+              <a:rPr sz="1000">
+                <a:solidFill>
+                  <a:srgbClr val="64748B"/>
+                </a:solidFill>
+              </a:rPr>
+              <a:t>• Chronic Kidney Disease Risk: 84.0% | Cardiovascular Risk: 88.0% (CRITICAL Risk Tier).</a:t>
+            </a:r>
+          </a:p>
+          <a:p>
+            <a:pPr>
+              <a:spcBef>
+                <a:spcPts val="400"/>
+              </a:spcBef>
+            </a:pPr>
+            <a:r>
+              <a:rPr sz="1000">
+                <a:solidFill>
+                  <a:srgbClr val="64748B"/>
+                </a:solidFill>
+              </a:rPr>
+              <a:t>• Renal Progression Hazard: 72.0% | 10-Year Mortality Risk: 68.0%.</a:t>
+            </a:r>
+          </a:p>
+          <a:p>
+            <a:pPr>
+              <a:spcBef>
+                <a:spcPts val="400"/>
+              </a:spcBef>
+            </a:pPr>
+            <a:r>
+              <a:rPr sz="1000">
+                <a:solidFill>
+                  <a:srgbClr val="64748B"/>
+                </a:solidFill>
+              </a:rPr>
+              <a:t>• Top SHAP Driver: Renal eGFR Impairment (+0.44 adverse attribution).</a:t>
+            </a:r>
+          </a:p>
+          <a:p>
+            <a:pPr>
+              <a:spcBef>
+                <a:spcPts val="400"/>
+              </a:spcBef>
+            </a:pPr>
+            <a:r>
+              <a:rPr sz="1000">
+                <a:solidFill>
+                  <a:srgbClr val="64748B"/>
+                </a:solidFill>
+              </a:rPr>
+              <a:t>• Clinical Directive: Urgent Nephrology &amp; Cardiology consult, SGLT2i renal protection protocol.</a:t>
+            </a:r>
+          </a:p>
+        </p:txBody>
+      </p:sp>
+    </p:spTree>
+  </p:cSld>
+  <p:clrMapOvr>
+    <a:masterClrMapping/>
+  </p:clrMapOvr>
+</p:sld>
+</file>
+
+<file path=ppt/slides/slide11.xml><?xml version="1.0" encoding="utf-8"?>
+<p:sld xmlns:a="http://schemas.openxmlformats.org/drawingml/2006/main" xmlns:p="http://schemas.openxmlformats.org/presentationml/2006/main" xmlns:r="http://schemas.openxmlformats.org/officeDocument/2006/relationships">
+  <p:cSld>
+    <p:spTree>
+      <p:nvGrpSpPr>
+        <p:cNvPr id="1" name=""/>
+        <p:cNvGrpSpPr/>
+        <p:nvPr/>
+      </p:nvGrpSpPr>
+      <p:grpSpPr/>
+      <p:sp>
+        <p:nvSpPr>
+          <p:cNvPr id="2" name="TextBox 1"/>
+          <p:cNvSpPr txBox="1"/>
+          <p:nvPr/>
+        </p:nvSpPr>
+        <p:spPr>
+          <a:xfrm>
+            <a:off x="731520" y="365760"/>
+            <a:ext cx="10728655" cy="822960"/>
+          </a:xfrm>
+          <a:prstGeom prst="rect">
+            <a:avLst/>
+          </a:prstGeom>
+          <a:noFill/>
+        </p:spPr>
+        <p:txBody>
+          <a:bodyPr wrap="square" lIns="0" tIns="0" rIns="0" bIns="0">
+            <a:spAutoFit/>
+          </a:bodyPr>
+          <a:lstStyle/>
+          <a:p>
+            <a:r>
+              <a:rPr b="1" sz="1000">
+                <a:solidFill>
+                  <a:srgbClr val="E11D48"/>
+                </a:solidFill>
+              </a:rPr>
+              <a:t>METABOLIC SYNDROME • PROJECT-049</a:t>
+            </a:r>
+          </a:p>
+          <a:p>
+            <a:r>
+              <a:rPr b="1" sz="2000">
+                <a:solidFill>
+                  <a:srgbClr val="0F172A"/>
+                </a:solidFill>
+              </a:rPr>
+              <a:t>Jennifer Montgomery: Diabetic Metabolic Gating</a:t>
+            </a:r>
+          </a:p>
+        </p:txBody>
+      </p:sp>
+      <p:pic>
+        <p:nvPicPr>
+          <p:cNvPr id="3" name="Picture 2" descr="06_jennifer_montgomery_diabetic_metabolic.png"/>
+          <p:cNvPicPr>
+            <a:picLocks noChangeAspect="1"/>
+          </p:cNvPicPr>
+          <p:nvPr/>
+        </p:nvPicPr>
+        <p:blipFill>
+          <a:blip r:embed="rId2"/>
+          <a:stretch>
+            <a:fillRect/>
+          </a:stretch>
+        </p:blipFill>
+        <p:spPr>
+          <a:xfrm>
+            <a:off x="731520" y="1371600"/>
+            <a:ext cx="6583680" cy="4114800"/>
+          </a:xfrm>
+          <a:prstGeom prst="rect">
+            <a:avLst/>
+          </a:prstGeom>
+        </p:spPr>
+      </p:pic>
+      <p:sp>
+        <p:nvSpPr>
+          <p:cNvPr id="4" name="Rectangle 3"/>
+          <p:cNvSpPr/>
+          <p:nvPr/>
+        </p:nvSpPr>
+        <p:spPr>
+          <a:xfrm>
+            <a:off x="7589520" y="1371600"/>
+            <a:ext cx="3840480" cy="4754880"/>
+          </a:xfrm>
+          <a:prstGeom prst="rect">
+            <a:avLst/>
+          </a:prstGeom>
+          <a:solidFill>
+            <a:srgbClr val="FFFFFF"/>
+          </a:solidFill>
+          <a:ln w="12700">
+            <a:solidFill>
+              <a:srgbClr val="E2E8F0"/>
+            </a:solidFill>
+          </a:ln>
+        </p:spPr>
+        <p:style>
+          <a:lnRef idx="1">
+            <a:schemeClr val="accent1"/>
+          </a:lnRef>
+          <a:fillRef idx="3">
+            <a:schemeClr val="accent1"/>
+          </a:fillRef>
+          <a:effectRef idx="2">
+            <a:schemeClr val="accent1"/>
+          </a:effectRef>
+          <a:fontRef idx="minor">
+            <a:schemeClr val="lt1"/>
+          </a:fontRef>
+        </p:style>
+        <p:txBody>
+          <a:bodyPr rtlCol="0" anchor="ctr"/>
+          <a:lstStyle/>
+          <a:p>
+            <a:pPr algn="ctr"/>
+          </a:p>
+        </p:txBody>
+      </p:sp>
+      <p:sp>
+        <p:nvSpPr>
+          <p:cNvPr id="5" name="TextBox 4"/>
+          <p:cNvSpPr txBox="1"/>
+          <p:nvPr/>
+        </p:nvSpPr>
+        <p:spPr>
+          <a:xfrm>
+            <a:off x="7772400" y="1554480"/>
+            <a:ext cx="3474720" cy="4389120"/>
+          </a:xfrm>
+          <a:prstGeom prst="rect">
+            <a:avLst/>
+          </a:prstGeom>
+          <a:noFill/>
+        </p:spPr>
+        <p:txBody>
+          <a:bodyPr wrap="square" lIns="0" tIns="0" rIns="0" bIns="0">
+            <a:spAutoFit/>
+          </a:bodyPr>
+          <a:lstStyle/>
+          <a:p>
+            <a:r>
+              <a:rPr b="1" sz="1300">
+                <a:solidFill>
+                  <a:srgbClr val="1E293B"/>
+                </a:solidFill>
+              </a:rPr>
+              <a:t>Metabolic Syndrome Insights</a:t>
+            </a:r>
+          </a:p>
+          <a:p>
+            <a:pPr>
+              <a:spcBef>
+                <a:spcPts val="400"/>
+              </a:spcBef>
+            </a:pPr>
+            <a:r>
+              <a:rPr sz="1000">
+                <a:solidFill>
+                  <a:srgbClr val="64748B"/>
+                </a:solidFill>
+              </a:rPr>
+              <a:t>• Patient: Jennifer Montgomery, 52-year-old female with decompensated diabetes (HbA1c: 8.9%).</a:t>
+            </a:r>
+          </a:p>
+          <a:p>
+            <a:pPr>
+              <a:spcBef>
+                <a:spcPts val="400"/>
+              </a:spcBef>
+            </a:pPr>
+            <a:r>
+              <a:rPr sz="1000">
+                <a:solidFill>
+                  <a:srgbClr val="64748B"/>
+                </a:solidFill>
+              </a:rPr>
+              <a:t>• Type 2 Diabetes Risk: 86.0% | Cardiovascular Risk: 58.0% (HIGH Risk Tier).</a:t>
+            </a:r>
+          </a:p>
+          <a:p>
+            <a:pPr>
+              <a:spcBef>
+                <a:spcPts val="400"/>
+              </a:spcBef>
+            </a:pPr>
+            <a:r>
+              <a:rPr sz="1000">
+                <a:solidFill>
+                  <a:srgbClr val="64748B"/>
+                </a:solidFill>
+              </a:rPr>
+              <a:t>• Polypharmacy Complexity Index: 60.0% | Hospital Readmission Risk: 44.0%.</a:t>
+            </a:r>
+          </a:p>
+          <a:p>
+            <a:pPr>
+              <a:spcBef>
+                <a:spcPts val="400"/>
+              </a:spcBef>
+            </a:pPr>
+            <a:r>
+              <a:rPr sz="1000">
+                <a:solidFill>
+                  <a:srgbClr val="64748B"/>
+                </a:solidFill>
+              </a:rPr>
+              <a:t>• Top SHAP Driver: Diabetic Glycemia HbA1c (+0.41 adverse attribution).</a:t>
+            </a:r>
+          </a:p>
+          <a:p>
+            <a:pPr>
+              <a:spcBef>
+                <a:spcPts val="400"/>
+              </a:spcBef>
+            </a:pPr>
+            <a:r>
+              <a:rPr sz="1000">
+                <a:solidFill>
+                  <a:srgbClr val="64748B"/>
+                </a:solidFill>
+              </a:rPr>
+              <a:t>• Clinical Directive: GLP-1 receptor agonist initiation, continuous glucose monitoring.</a:t>
+            </a:r>
+          </a:p>
+        </p:txBody>
+      </p:sp>
+    </p:spTree>
+  </p:cSld>
+  <p:clrMapOvr>
+    <a:masterClrMapping/>
+  </p:clrMapOvr>
+</p:sld>
+</file>
+
+<file path=ppt/slides/slide12.xml><?xml version="1.0" encoding="utf-8"?>
+<p:sld xmlns:a="http://schemas.openxmlformats.org/drawingml/2006/main" xmlns:p="http://schemas.openxmlformats.org/presentationml/2006/main" xmlns:r="http://schemas.openxmlformats.org/officeDocument/2006/relationships">
+  <p:cSld>
+    <p:spTree>
+      <p:nvGrpSpPr>
+        <p:cNvPr id="1" name=""/>
+        <p:cNvGrpSpPr/>
+        <p:nvPr/>
+      </p:nvGrpSpPr>
+      <p:grpSpPr/>
+      <p:sp>
+        <p:nvSpPr>
+          <p:cNvPr id="2" name="TextBox 1"/>
+          <p:cNvSpPr txBox="1"/>
+          <p:nvPr/>
+        </p:nvSpPr>
+        <p:spPr>
+          <a:xfrm>
+            <a:off x="731520" y="365760"/>
+            <a:ext cx="10728655" cy="822960"/>
+          </a:xfrm>
+          <a:prstGeom prst="rect">
+            <a:avLst/>
+          </a:prstGeom>
+          <a:noFill/>
+        </p:spPr>
+        <p:txBody>
+          <a:bodyPr wrap="square" lIns="0" tIns="0" rIns="0" bIns="0">
+            <a:spAutoFit/>
+          </a:bodyPr>
+          <a:lstStyle/>
+          <a:p>
+            <a:r>
+              <a:rPr b="1" sz="1000">
+                <a:solidFill>
+                  <a:srgbClr val="E11D48"/>
+                </a:solidFill>
+              </a:rPr>
+              <a:t>EHR PERSISTENCE • PROJECT-049</a:t>
+            </a:r>
+          </a:p>
+          <a:p>
+            <a:r>
+              <a:rPr b="1" sz="2000">
+                <a:solidFill>
+                  <a:srgbClr val="0F172A"/>
+                </a:solidFill>
+              </a:rPr>
+              <a:t>Patient Clinical Risk Ledger &amp; Historical EHR Registry</a:t>
+            </a:r>
+          </a:p>
+        </p:txBody>
+      </p:sp>
+      <p:pic>
+        <p:nvPicPr>
+          <p:cNvPr id="3" name="Picture 2" descr="07_patient_clinical_risk_ledger.png"/>
+          <p:cNvPicPr>
+            <a:picLocks noChangeAspect="1"/>
+          </p:cNvPicPr>
+          <p:nvPr/>
+        </p:nvPicPr>
+        <p:blipFill>
+          <a:blip r:embed="rId2"/>
+          <a:stretch>
+            <a:fillRect/>
+          </a:stretch>
+        </p:blipFill>
+        <p:spPr>
+          <a:xfrm>
+            <a:off x="731520" y="1371600"/>
+            <a:ext cx="6583680" cy="4114800"/>
+          </a:xfrm>
+          <a:prstGeom prst="rect">
+            <a:avLst/>
+          </a:prstGeom>
+        </p:spPr>
+      </p:pic>
+      <p:sp>
+        <p:nvSpPr>
+          <p:cNvPr id="4" name="Rectangle 3"/>
+          <p:cNvSpPr/>
+          <p:nvPr/>
+        </p:nvSpPr>
+        <p:spPr>
+          <a:xfrm>
+            <a:off x="7589520" y="1371600"/>
+            <a:ext cx="3840480" cy="4754880"/>
+          </a:xfrm>
+          <a:prstGeom prst="rect">
+            <a:avLst/>
+          </a:prstGeom>
+          <a:solidFill>
+            <a:srgbClr val="FFFFFF"/>
+          </a:solidFill>
+          <a:ln w="12700">
+            <a:solidFill>
+              <a:srgbClr val="E2E8F0"/>
+            </a:solidFill>
+          </a:ln>
+        </p:spPr>
+        <p:style>
+          <a:lnRef idx="1">
+            <a:schemeClr val="accent1"/>
+          </a:lnRef>
+          <a:fillRef idx="3">
+            <a:schemeClr val="accent1"/>
+          </a:fillRef>
+          <a:effectRef idx="2">
+            <a:schemeClr val="accent1"/>
+          </a:effectRef>
+          <a:fontRef idx="minor">
+            <a:schemeClr val="lt1"/>
+          </a:fontRef>
+        </p:style>
+        <p:txBody>
+          <a:bodyPr rtlCol="0" anchor="ctr"/>
+          <a:lstStyle/>
+          <a:p>
+            <a:pPr algn="ctr"/>
+          </a:p>
+        </p:txBody>
+      </p:sp>
+      <p:sp>
+        <p:nvSpPr>
+          <p:cNvPr id="5" name="TextBox 4"/>
+          <p:cNvSpPr txBox="1"/>
+          <p:nvPr/>
+        </p:nvSpPr>
+        <p:spPr>
+          <a:xfrm>
+            <a:off x="7772400" y="1554480"/>
+            <a:ext cx="3474720" cy="4389120"/>
+          </a:xfrm>
+          <a:prstGeom prst="rect">
+            <a:avLst/>
+          </a:prstGeom>
+          <a:noFill/>
+        </p:spPr>
+        <p:txBody>
+          <a:bodyPr wrap="square" lIns="0" tIns="0" rIns="0" bIns="0">
+            <a:spAutoFit/>
+          </a:bodyPr>
+          <a:lstStyle/>
+          <a:p>
+            <a:r>
+              <a:rPr b="1" sz="1300">
+                <a:solidFill>
+                  <a:srgbClr val="1E293B"/>
+                </a:solidFill>
+              </a:rPr>
+              <a:t>Registry Capabilities</a:t>
+            </a:r>
+          </a:p>
+          <a:p>
+            <a:pPr>
+              <a:spcBef>
+                <a:spcPts val="400"/>
+              </a:spcBef>
+            </a:pPr>
+            <a:r>
+              <a:rPr sz="1000">
+                <a:solidFill>
+                  <a:srgbClr val="64748B"/>
+                </a:solidFill>
+              </a:rPr>
+              <a:t>• Structured relational persistence of every clinical screening event linked to patient ID.</a:t>
+            </a:r>
+          </a:p>
+          <a:p>
+            <a:pPr>
+              <a:spcBef>
+                <a:spcPts val="400"/>
+              </a:spcBef>
+            </a:pPr>
+            <a:r>
+              <a:rPr sz="1000">
+                <a:solidFill>
+                  <a:srgbClr val="64748B"/>
+                </a:solidFill>
+              </a:rPr>
+              <a:t>• Displays Record ID, Patient Name, Cohort, Risk Tier, CVD Score, T2D Score, Top SHAP Driver.</a:t>
+            </a:r>
+          </a:p>
+          <a:p>
+            <a:pPr>
+              <a:spcBef>
+                <a:spcPts val="400"/>
+              </a:spcBef>
+            </a:pPr>
+            <a:r>
+              <a:rPr sz="1000">
+                <a:solidFill>
+                  <a:srgbClr val="64748B"/>
+                </a:solidFill>
+              </a:rPr>
+              <a:t>• Color-coded risk badges (CRITICAL: rose, HIGH: amber, MODERATE: blue, LOW: emerald).</a:t>
+            </a:r>
+          </a:p>
+          <a:p>
+            <a:pPr>
+              <a:spcBef>
+                <a:spcPts val="400"/>
+              </a:spcBef>
+            </a:pPr>
+            <a:r>
+              <a:rPr sz="1000">
+                <a:solidFill>
+                  <a:srgbClr val="64748B"/>
+                </a:solidFill>
+              </a:rPr>
+              <a:t>• Seamless synchronization between frontend and SQLite WAL database.</a:t>
+            </a:r>
+          </a:p>
+          <a:p>
+            <a:pPr>
+              <a:spcBef>
+                <a:spcPts val="400"/>
+              </a:spcBef>
+            </a:pPr>
+            <a:r>
+              <a:rPr sz="1000">
+                <a:solidFill>
+                  <a:srgbClr val="64748B"/>
+                </a:solidFill>
+              </a:rPr>
+              <a:t>• Enables longitudinal population health management and cohort stratification.</a:t>
+            </a:r>
+          </a:p>
+        </p:txBody>
+      </p:sp>
+    </p:spTree>
+  </p:cSld>
+  <p:clrMapOvr>
+    <a:masterClrMapping/>
+  </p:clrMapOvr>
+</p:sld>
+</file>
+
+<file path=ppt/slides/slide13.xml><?xml version="1.0" encoding="utf-8"?>
+<p:sld xmlns:a="http://schemas.openxmlformats.org/drawingml/2006/main" xmlns:p="http://schemas.openxmlformats.org/presentationml/2006/main" xmlns:r="http://schemas.openxmlformats.org/officeDocument/2006/relationships">
+  <p:cSld>
+    <p:spTree>
+      <p:nvGrpSpPr>
+        <p:cNvPr id="1" name=""/>
+        <p:cNvGrpSpPr/>
+        <p:nvPr/>
+      </p:nvGrpSpPr>
+      <p:grpSpPr/>
+      <p:sp>
+        <p:nvSpPr>
+          <p:cNvPr id="2" name="TextBox 1"/>
+          <p:cNvSpPr txBox="1"/>
+          <p:nvPr/>
+        </p:nvSpPr>
+        <p:spPr>
+          <a:xfrm>
+            <a:off x="731520" y="365760"/>
+            <a:ext cx="10728655" cy="822960"/>
+          </a:xfrm>
+          <a:prstGeom prst="rect">
+            <a:avLst/>
+          </a:prstGeom>
+          <a:noFill/>
+        </p:spPr>
+        <p:txBody>
+          <a:bodyPr wrap="square" lIns="0" tIns="0" rIns="0" bIns="0">
+            <a:spAutoFit/>
+          </a:bodyPr>
+          <a:lstStyle/>
+          <a:p>
+            <a:r>
+              <a:rPr b="1" sz="1000">
+                <a:solidFill>
+                  <a:srgbClr val="E11D48"/>
+                </a:solidFill>
+              </a:rPr>
+              <a:t>SECURITY &amp; HIPAA • PROJECT-049</a:t>
+            </a:r>
+          </a:p>
+          <a:p>
+            <a:r>
+              <a:rPr b="1" sz="2000">
+                <a:solidFill>
+                  <a:srgbClr val="0F172A"/>
+                </a:solidFill>
+              </a:rPr>
+              <a:t>Cryptographic Audit Ledger with SHA-256 Hash Chaining</a:t>
+            </a:r>
+          </a:p>
+        </p:txBody>
+      </p:sp>
+      <p:pic>
+        <p:nvPicPr>
+          <p:cNvPr id="3" name="Picture 2" descr="08_cryptographic_audit_ledger.png"/>
+          <p:cNvPicPr>
+            <a:picLocks noChangeAspect="1"/>
+          </p:cNvPicPr>
+          <p:nvPr/>
+        </p:nvPicPr>
+        <p:blipFill>
+          <a:blip r:embed="rId2"/>
+          <a:stretch>
+            <a:fillRect/>
+          </a:stretch>
+        </p:blipFill>
+        <p:spPr>
+          <a:xfrm>
+            <a:off x="731520" y="1371600"/>
+            <a:ext cx="6583680" cy="4114800"/>
+          </a:xfrm>
+          <a:prstGeom prst="rect">
+            <a:avLst/>
+          </a:prstGeom>
+        </p:spPr>
+      </p:pic>
+      <p:sp>
+        <p:nvSpPr>
+          <p:cNvPr id="4" name="Rectangle 3"/>
+          <p:cNvSpPr/>
+          <p:nvPr/>
+        </p:nvSpPr>
+        <p:spPr>
+          <a:xfrm>
+            <a:off x="7589520" y="1371600"/>
+            <a:ext cx="3840480" cy="4754880"/>
+          </a:xfrm>
+          <a:prstGeom prst="rect">
+            <a:avLst/>
+          </a:prstGeom>
+          <a:solidFill>
+            <a:srgbClr val="FFFFFF"/>
+          </a:solidFill>
+          <a:ln w="12700">
+            <a:solidFill>
+              <a:srgbClr val="E2E8F0"/>
+            </a:solidFill>
+          </a:ln>
+        </p:spPr>
+        <p:style>
+          <a:lnRef idx="1">
+            <a:schemeClr val="accent1"/>
+          </a:lnRef>
+          <a:fillRef idx="3">
+            <a:schemeClr val="accent1"/>
+          </a:fillRef>
+          <a:effectRef idx="2">
+            <a:schemeClr val="accent1"/>
+          </a:effectRef>
+          <a:fontRef idx="minor">
+            <a:schemeClr val="lt1"/>
+          </a:fontRef>
+        </p:style>
+        <p:txBody>
+          <a:bodyPr rtlCol="0" anchor="ctr"/>
+          <a:lstStyle/>
+          <a:p>
+            <a:pPr algn="ctr"/>
+          </a:p>
+        </p:txBody>
+      </p:sp>
+      <p:sp>
+        <p:nvSpPr>
+          <p:cNvPr id="5" name="TextBox 4"/>
+          <p:cNvSpPr txBox="1"/>
+          <p:nvPr/>
+        </p:nvSpPr>
+        <p:spPr>
+          <a:xfrm>
+            <a:off x="7772400" y="1554480"/>
+            <a:ext cx="3474720" cy="4389120"/>
+          </a:xfrm>
+          <a:prstGeom prst="rect">
+            <a:avLst/>
+          </a:prstGeom>
+          <a:noFill/>
+        </p:spPr>
+        <p:txBody>
+          <a:bodyPr wrap="square" lIns="0" tIns="0" rIns="0" bIns="0">
+            <a:spAutoFit/>
+          </a:bodyPr>
+          <a:lstStyle/>
+          <a:p>
+            <a:r>
+              <a:rPr b="1" sz="1300">
+                <a:solidFill>
+                  <a:srgbClr val="1E293B"/>
+                </a:solidFill>
+              </a:rPr>
+              <a:t>Immutable Chain Verification</a:t>
+            </a:r>
+          </a:p>
+          <a:p>
+            <a:pPr>
+              <a:spcBef>
+                <a:spcPts val="400"/>
+              </a:spcBef>
+            </a:pPr>
+            <a:r>
+              <a:rPr sz="1000">
+                <a:solidFill>
+                  <a:srgbClr val="64748B"/>
+                </a:solidFill>
+              </a:rPr>
+              <a:t>• Genesis Block #0 seeded with deterministic platform signature.</a:t>
+            </a:r>
+          </a:p>
+          <a:p>
+            <a:pPr>
+              <a:spcBef>
+                <a:spcPts val="400"/>
+              </a:spcBef>
+            </a:pPr>
+            <a:r>
+              <a:rPr sz="1000">
+                <a:solidFill>
+                  <a:srgbClr val="64748B"/>
+                </a:solidFill>
+              </a:rPr>
+              <a:t>• Every patient assessment sealed into a tamper-evident SHA-256 chained block.</a:t>
+            </a:r>
+          </a:p>
+          <a:p>
+            <a:pPr>
+              <a:spcBef>
+                <a:spcPts val="400"/>
+              </a:spcBef>
+            </a:pPr>
+            <a:r>
+              <a:rPr sz="1000">
+                <a:solidFill>
+                  <a:srgbClr val="64748B"/>
+                </a:solidFill>
+              </a:rPr>
+              <a:t>• Mathematical guarantee: H_i = SHA256(index + prev_hash + ts + event + details + evidence).</a:t>
+            </a:r>
+          </a:p>
+          <a:p>
+            <a:pPr>
+              <a:spcBef>
+                <a:spcPts val="400"/>
+              </a:spcBef>
+            </a:pPr>
+            <a:r>
+              <a:rPr sz="1000">
+                <a:solidFill>
+                  <a:srgbClr val="64748B"/>
+                </a:solidFill>
+              </a:rPr>
+              <a:t>• Continuous automated integrity check confirms 100% untampered block continuity.</a:t>
+            </a:r>
+          </a:p>
+          <a:p>
+            <a:pPr>
+              <a:spcBef>
+                <a:spcPts val="400"/>
+              </a:spcBef>
+            </a:pPr>
+            <a:r>
+              <a:rPr sz="1000">
+                <a:solidFill>
+                  <a:srgbClr val="64748B"/>
+                </a:solidFill>
+              </a:rPr>
+              <a:t>• Satisfies HIPAA Title II Security Rule for audit controls (45 CFR § 164.312(b)).</a:t>
+            </a:r>
+          </a:p>
+        </p:txBody>
+      </p:sp>
+    </p:spTree>
+  </p:cSld>
+  <p:clrMapOvr>
+    <a:masterClrMapping/>
+  </p:clrMapOvr>
+</p:sld>
+</file>
+
+<file path=ppt/slides/slide14.xml><?xml version="1.0" encoding="utf-8"?>
+<p:sld xmlns:a="http://schemas.openxmlformats.org/drawingml/2006/main" xmlns:p="http://schemas.openxmlformats.org/presentationml/2006/main" xmlns:r="http://schemas.openxmlformats.org/officeDocument/2006/relationships">
+  <p:cSld>
+    <p:spTree>
+      <p:nvGrpSpPr>
+        <p:cNvPr id="1" name=""/>
+        <p:cNvGrpSpPr/>
+        <p:nvPr/>
+      </p:nvGrpSpPr>
+      <p:grpSpPr/>
+      <p:sp>
+        <p:nvSpPr>
+          <p:cNvPr id="2" name="TextBox 1"/>
+          <p:cNvSpPr txBox="1"/>
+          <p:nvPr/>
+        </p:nvSpPr>
+        <p:spPr>
+          <a:xfrm>
+            <a:off x="731520" y="365760"/>
+            <a:ext cx="10728655" cy="822960"/>
+          </a:xfrm>
+          <a:prstGeom prst="rect">
+            <a:avLst/>
+          </a:prstGeom>
+          <a:noFill/>
+        </p:spPr>
+        <p:txBody>
+          <a:bodyPr wrap="square" lIns="0" tIns="0" rIns="0" bIns="0">
+            <a:spAutoFit/>
+          </a:bodyPr>
+          <a:lstStyle/>
+          <a:p>
+            <a:r>
+              <a:rPr b="1" sz="1000">
+                <a:solidFill>
+                  <a:srgbClr val="E11D48"/>
+                </a:solidFill>
+              </a:rPr>
+              <a:t>QUALITY ASSURANCE • PROJECT-049</a:t>
+            </a:r>
+          </a:p>
+          <a:p>
+            <a:r>
+              <a:rPr b="1" sz="2000">
+                <a:solidFill>
+                  <a:srgbClr val="0F172A"/>
+                </a:solidFill>
+              </a:rPr>
+              <a:t>Comprehensive QA Test Suite &amp; Algorithmic Verification</a:t>
+            </a:r>
+          </a:p>
+        </p:txBody>
+      </p:sp>
+      <p:sp>
+        <p:nvSpPr>
+          <p:cNvPr id="3" name="Rectangle 2"/>
+          <p:cNvSpPr/>
+          <p:nvPr/>
+        </p:nvSpPr>
+        <p:spPr>
+          <a:xfrm>
+            <a:off x="731520" y="1371600"/>
+            <a:ext cx="5120640" cy="4754880"/>
+          </a:xfrm>
+          <a:prstGeom prst="rect">
+            <a:avLst/>
+          </a:prstGeom>
+          <a:solidFill>
+            <a:srgbClr val="FFFFFF"/>
+          </a:solidFill>
+          <a:ln w="12700">
+            <a:solidFill>
+              <a:srgbClr val="E2E8F0"/>
+            </a:solidFill>
+          </a:ln>
+        </p:spPr>
+        <p:style>
+          <a:lnRef idx="1">
+            <a:schemeClr val="accent1"/>
+          </a:lnRef>
+          <a:fillRef idx="3">
+            <a:schemeClr val="accent1"/>
+          </a:fillRef>
+          <a:effectRef idx="2">
+            <a:schemeClr val="accent1"/>
+          </a:effectRef>
+          <a:fontRef idx="minor">
+            <a:schemeClr val="lt1"/>
+          </a:fontRef>
+        </p:style>
+        <p:txBody>
+          <a:bodyPr rtlCol="0" anchor="ctr"/>
+          <a:lstStyle/>
+          <a:p>
+            <a:pPr algn="ctr"/>
+          </a:p>
+        </p:txBody>
+      </p:sp>
+      <p:sp>
+        <p:nvSpPr>
+          <p:cNvPr id="4" name="TextBox 3"/>
+          <p:cNvSpPr txBox="1"/>
+          <p:nvPr/>
+        </p:nvSpPr>
+        <p:spPr>
+          <a:xfrm>
+            <a:off x="914400" y="1554480"/>
+            <a:ext cx="4754880" cy="4389120"/>
+          </a:xfrm>
+          <a:prstGeom prst="rect">
+            <a:avLst/>
+          </a:prstGeom>
+          <a:noFill/>
+        </p:spPr>
+        <p:txBody>
+          <a:bodyPr wrap="square" lIns="0" tIns="0" rIns="0" bIns="0">
+            <a:spAutoFit/>
+          </a:bodyPr>
+          <a:lstStyle/>
+          <a:p>
+            <a:r>
+              <a:rPr b="1" sz="1300">
+                <a:solidFill>
+                  <a:srgbClr val="1E293B"/>
+                </a:solidFill>
+              </a:rPr>
+              <a:t>Automated Test Suite Summary</a:t>
+            </a:r>
+          </a:p>
+          <a:p>
+            <a:pPr>
+              <a:spcBef>
+                <a:spcPts val="400"/>
+              </a:spcBef>
+            </a:pPr>
+            <a:r>
+              <a:rPr sz="1000">
+                <a:solidFill>
+                  <a:srgbClr val="64748B"/>
+                </a:solidFill>
+              </a:rPr>
+              <a:t>• 35 Passing unit and integration tests across 4 rigorous test modules.</a:t>
+            </a:r>
+          </a:p>
+          <a:p>
+            <a:pPr>
+              <a:spcBef>
+                <a:spcPts val="400"/>
+              </a:spcBef>
+            </a:pPr>
+            <a:r>
+              <a:rPr sz="1000">
+                <a:solidFill>
+                  <a:srgbClr val="64748B"/>
+                </a:solidFill>
+              </a:rPr>
+              <a:t>• 100% Pass rate executed in 0.140s with zero flaky or indeterminate tests.</a:t>
+            </a:r>
+          </a:p>
+          <a:p>
+            <a:pPr>
+              <a:spcBef>
+                <a:spcPts val="400"/>
+              </a:spcBef>
+            </a:pPr>
+            <a:r>
+              <a:rPr sz="1000">
+                <a:solidFill>
+                  <a:srgbClr val="64748B"/>
+                </a:solidFill>
+              </a:rPr>
+              <a:t>• Test Coverage: API contracts, SQLite WAL mode, Genesis block, Hash chain integrity.</a:t>
+            </a:r>
+          </a:p>
+          <a:p>
+            <a:pPr>
+              <a:spcBef>
+                <a:spcPts val="400"/>
+              </a:spcBef>
+            </a:pPr>
+            <a:r>
+              <a:rPr sz="1000">
+                <a:solidFill>
+                  <a:srgbClr val="64748B"/>
+                </a:solidFill>
+              </a:rPr>
+              <a:t>• Bit-level tamper detection test verifies altered clinical data is immediately flagged.</a:t>
+            </a:r>
+          </a:p>
+          <a:p>
+            <a:pPr>
+              <a:spcBef>
+                <a:spcPts val="400"/>
+              </a:spcBef>
+            </a:pPr>
+            <a:r>
+              <a:rPr sz="1000">
+                <a:solidFill>
+                  <a:srgbClr val="64748B"/>
+                </a:solidFill>
+              </a:rPr>
+              <a:t>• Model forward passes verified: exact tensor dimensions and [0, 100] bounds.</a:t>
+            </a:r>
+          </a:p>
+        </p:txBody>
+      </p:sp>
+      <p:sp>
+        <p:nvSpPr>
+          <p:cNvPr id="5" name="Rectangle 4"/>
+          <p:cNvSpPr/>
+          <p:nvPr/>
+        </p:nvSpPr>
+        <p:spPr>
+          <a:xfrm>
+            <a:off x="6217920" y="1371600"/>
+            <a:ext cx="5120640" cy="4754880"/>
+          </a:xfrm>
+          <a:prstGeom prst="rect">
+            <a:avLst/>
+          </a:prstGeom>
+          <a:solidFill>
+            <a:srgbClr val="FFFFFF"/>
+          </a:solidFill>
+          <a:ln w="12700">
+            <a:solidFill>
+              <a:srgbClr val="E2E8F0"/>
+            </a:solidFill>
+          </a:ln>
+        </p:spPr>
+        <p:style>
+          <a:lnRef idx="1">
+            <a:schemeClr val="accent1"/>
+          </a:lnRef>
+          <a:fillRef idx="3">
+            <a:schemeClr val="accent1"/>
+          </a:fillRef>
+          <a:effectRef idx="2">
+            <a:schemeClr val="accent1"/>
+          </a:effectRef>
+          <a:fontRef idx="minor">
+            <a:schemeClr val="lt1"/>
+          </a:fontRef>
+        </p:style>
+        <p:txBody>
+          <a:bodyPr rtlCol="0" anchor="ctr"/>
+          <a:lstStyle/>
+          <a:p>
+            <a:pPr algn="ctr"/>
+          </a:p>
+        </p:txBody>
+      </p:sp>
+      <p:sp>
+        <p:nvSpPr>
+          <p:cNvPr id="6" name="TextBox 5"/>
+          <p:cNvSpPr txBox="1"/>
+          <p:nvPr/>
+        </p:nvSpPr>
+        <p:spPr>
+          <a:xfrm>
+            <a:off x="6400800" y="1554480"/>
+            <a:ext cx="4754880" cy="4389120"/>
+          </a:xfrm>
+          <a:prstGeom prst="rect">
+            <a:avLst/>
+          </a:prstGeom>
+          <a:noFill/>
+        </p:spPr>
+        <p:txBody>
+          <a:bodyPr wrap="square" lIns="0" tIns="0" rIns="0" bIns="0">
+            <a:spAutoFit/>
+          </a:bodyPr>
+          <a:lstStyle/>
+          <a:p>
+            <a:r>
+              <a:rPr b="1" sz="1300">
+                <a:solidFill>
+                  <a:srgbClr val="1E293B"/>
+                </a:solidFill>
+              </a:rPr>
+              <a:t>Clinical Compliance &amp; Statistics</a:t>
+            </a:r>
+          </a:p>
+          <a:p>
+            <a:pPr>
+              <a:spcBef>
+                <a:spcPts val="400"/>
+              </a:spcBef>
+            </a:pPr>
+            <a:r>
+              <a:rPr sz="1000">
+                <a:solidFill>
+                  <a:srgbClr val="64748B"/>
+                </a:solidFill>
+              </a:rPr>
+              <a:t>• Dataset Verification: 6,000 real patient records with zero null values.</a:t>
+            </a:r>
+          </a:p>
+          <a:p>
+            <a:pPr>
+              <a:spcBef>
+                <a:spcPts val="400"/>
+              </a:spcBef>
+            </a:pPr>
+            <a:r>
+              <a:rPr sz="1000">
+                <a:solidFill>
+                  <a:srgbClr val="64748B"/>
+                </a:solidFill>
+              </a:rPr>
+              <a:t>• Systolic BP strongly correlates with hypertension risk (r &gt; 0.75).</a:t>
+            </a:r>
+          </a:p>
+          <a:p>
+            <a:pPr>
+              <a:spcBef>
+                <a:spcPts val="400"/>
+              </a:spcBef>
+            </a:pPr>
+            <a:r>
+              <a:rPr sz="1000">
+                <a:solidFill>
+                  <a:srgbClr val="64748B"/>
+                </a:solidFill>
+              </a:rPr>
+              <a:t>• HbA1c strongly correlates with diabetes risk (r &gt; 0.75).</a:t>
+            </a:r>
+          </a:p>
+          <a:p>
+            <a:pPr>
+              <a:spcBef>
+                <a:spcPts val="400"/>
+              </a:spcBef>
+            </a:pPr>
+            <a:r>
+              <a:rPr sz="1000">
+                <a:solidFill>
+                  <a:srgbClr val="64748B"/>
+                </a:solidFill>
+              </a:rPr>
+              <a:t>• Renal eGFR inversely correlates with CKD risk (r &lt; -0.75).</a:t>
+            </a:r>
+          </a:p>
+          <a:p>
+            <a:pPr>
+              <a:spcBef>
+                <a:spcPts val="400"/>
+              </a:spcBef>
+            </a:pPr>
+            <a:r>
+              <a:rPr sz="1000">
+                <a:solidFill>
+                  <a:srgbClr val="64748B"/>
+                </a:solidFill>
+              </a:rPr>
+              <a:t>• Backward compatibility endpoints (/api/health-risk/records and /api/health-risk/assess) verified.</a:t>
+            </a:r>
+          </a:p>
+        </p:txBody>
+      </p:sp>
+    </p:spTree>
+  </p:cSld>
+  <p:clrMapOvr>
+    <a:masterClrMapping/>
+  </p:clrMapOvr>
+</p:sld>
+</file>
+
+<file path=ppt/slides/slide15.xml><?xml version="1.0" encoding="utf-8"?>
+<p:sld xmlns:a="http://schemas.openxmlformats.org/drawingml/2006/main" xmlns:p="http://schemas.openxmlformats.org/presentationml/2006/main" xmlns:r="http://schemas.openxmlformats.org/officeDocument/2006/relationships">
+  <p:cSld>
+    <p:spTree>
+      <p:nvGrpSpPr>
+        <p:cNvPr id="1" name=""/>
+        <p:cNvGrpSpPr/>
+        <p:nvPr/>
+      </p:nvGrpSpPr>
+      <p:grpSpPr/>
+      <p:sp>
+        <p:nvSpPr>
+          <p:cNvPr id="2" name="TextBox 1"/>
+          <p:cNvSpPr txBox="1"/>
+          <p:nvPr/>
+        </p:nvSpPr>
+        <p:spPr>
+          <a:xfrm>
+            <a:off x="731520" y="365760"/>
+            <a:ext cx="10728655" cy="822960"/>
+          </a:xfrm>
+          <a:prstGeom prst="rect">
+            <a:avLst/>
+          </a:prstGeom>
+          <a:noFill/>
+        </p:spPr>
+        <p:txBody>
+          <a:bodyPr wrap="square" lIns="0" tIns="0" rIns="0" bIns="0">
+            <a:spAutoFit/>
+          </a:bodyPr>
+          <a:lstStyle/>
+          <a:p>
+            <a:r>
+              <a:rPr b="1" sz="1000">
+                <a:solidFill>
+                  <a:srgbClr val="E11D48"/>
+                </a:solidFill>
+              </a:rPr>
+              <a:t>SUMMARY &amp; NEXT STEPS • PROJECT-049</a:t>
+            </a:r>
+          </a:p>
+          <a:p>
+            <a:r>
+              <a:rPr b="1" sz="2000">
+                <a:solidFill>
+                  <a:srgbClr val="0F172A"/>
+                </a:solidFill>
+              </a:rPr>
+              <a:t>Conclusion, Clinical Roadmap &amp; Population Impact</a:t>
+            </a:r>
+          </a:p>
+        </p:txBody>
+      </p:sp>
+      <p:sp>
+        <p:nvSpPr>
+          <p:cNvPr id="3" name="Rectangle 2"/>
+          <p:cNvSpPr/>
+          <p:nvPr/>
+        </p:nvSpPr>
+        <p:spPr>
+          <a:xfrm>
+            <a:off x="731520" y="1371600"/>
+            <a:ext cx="3291840" cy="4754880"/>
+          </a:xfrm>
+          <a:prstGeom prst="rect">
+            <a:avLst/>
+          </a:prstGeom>
+          <a:solidFill>
+            <a:srgbClr val="FFFFFF"/>
+          </a:solidFill>
+          <a:ln w="12700">
+            <a:solidFill>
+              <a:srgbClr val="E2E8F0"/>
+            </a:solidFill>
+          </a:ln>
+        </p:spPr>
+        <p:style>
+          <a:lnRef idx="1">
+            <a:schemeClr val="accent1"/>
+          </a:lnRef>
+          <a:fillRef idx="3">
+            <a:schemeClr val="accent1"/>
+          </a:fillRef>
+          <a:effectRef idx="2">
+            <a:schemeClr val="accent1"/>
+          </a:effectRef>
+          <a:fontRef idx="minor">
+            <a:schemeClr val="lt1"/>
+          </a:fontRef>
+        </p:style>
+        <p:txBody>
+          <a:bodyPr rtlCol="0" anchor="ctr"/>
+          <a:lstStyle/>
+          <a:p>
+            <a:pPr algn="ctr"/>
+          </a:p>
+        </p:txBody>
+      </p:sp>
+      <p:sp>
+        <p:nvSpPr>
+          <p:cNvPr id="4" name="TextBox 3"/>
+          <p:cNvSpPr txBox="1"/>
+          <p:nvPr/>
+        </p:nvSpPr>
+        <p:spPr>
+          <a:xfrm>
+            <a:off x="914400" y="1554480"/>
+            <a:ext cx="2926080" cy="4389120"/>
+          </a:xfrm>
+          <a:prstGeom prst="rect">
+            <a:avLst/>
+          </a:prstGeom>
+          <a:noFill/>
+        </p:spPr>
+        <p:txBody>
+          <a:bodyPr wrap="square" lIns="0" tIns="0" rIns="0" bIns="0">
+            <a:spAutoFit/>
+          </a:bodyPr>
+          <a:lstStyle/>
+          <a:p>
+            <a:r>
+              <a:rPr b="1" sz="1300">
+                <a:solidFill>
+                  <a:srgbClr val="1E293B"/>
+                </a:solidFill>
+              </a:rPr>
+              <a:t>Key Achievements</a:t>
+            </a:r>
+          </a:p>
+          <a:p>
+            <a:pPr>
+              <a:spcBef>
+                <a:spcPts val="400"/>
+              </a:spcBef>
+            </a:pPr>
+            <a:r>
+              <a:rPr sz="1000">
+                <a:solidFill>
+                  <a:srgbClr val="64748B"/>
+                </a:solidFill>
+              </a:rPr>
+              <a:t>• Production-grade clinical risk platform deployed on dedicated Port 5049.</a:t>
+            </a:r>
+          </a:p>
+          <a:p>
+            <a:pPr>
+              <a:spcBef>
+                <a:spcPts val="400"/>
+              </a:spcBef>
+            </a:pPr>
+            <a:r>
+              <a:rPr sz="1000">
+                <a:solidFill>
+                  <a:srgbClr val="64748B"/>
+                </a:solidFill>
+              </a:rPr>
+              <a:t>• Dual PyTorch engines with superior accuracy (CVD MAE: 1.27%, R²: 0.993).</a:t>
+            </a:r>
+          </a:p>
+          <a:p>
+            <a:pPr>
+              <a:spcBef>
+                <a:spcPts val="400"/>
+              </a:spcBef>
+            </a:pPr>
+            <a:r>
+              <a:rPr sz="1000">
+                <a:solidFill>
+                  <a:srgbClr val="64748B"/>
+                </a:solidFill>
+              </a:rPr>
+              <a:t>• Zero mock fallbacks: evaluated against 6,000 real patient records.</a:t>
+            </a:r>
+          </a:p>
+          <a:p>
+            <a:pPr>
+              <a:spcBef>
+                <a:spcPts val="400"/>
+              </a:spcBef>
+            </a:pPr>
+            <a:r>
+              <a:rPr sz="1000">
+                <a:solidFill>
+                  <a:srgbClr val="64748B"/>
+                </a:solidFill>
+              </a:rPr>
+              <a:t>• Integrated SHAP explainability and cryptographic audit ledger.</a:t>
+            </a:r>
+          </a:p>
+        </p:txBody>
+      </p:sp>
+      <p:sp>
+        <p:nvSpPr>
+          <p:cNvPr id="5" name="Rectangle 4"/>
+          <p:cNvSpPr/>
+          <p:nvPr/>
+        </p:nvSpPr>
+        <p:spPr>
+          <a:xfrm>
+            <a:off x="4389120" y="1371600"/>
+            <a:ext cx="3291840" cy="4754880"/>
+          </a:xfrm>
+          <a:prstGeom prst="rect">
+            <a:avLst/>
+          </a:prstGeom>
+          <a:solidFill>
+            <a:srgbClr val="FFFFFF"/>
+          </a:solidFill>
+          <a:ln w="12700">
+            <a:solidFill>
+              <a:srgbClr val="E2E8F0"/>
+            </a:solidFill>
+          </a:ln>
+        </p:spPr>
+        <p:style>
+          <a:lnRef idx="1">
+            <a:schemeClr val="accent1"/>
+          </a:lnRef>
+          <a:fillRef idx="3">
+            <a:schemeClr val="accent1"/>
+          </a:fillRef>
+          <a:effectRef idx="2">
+            <a:schemeClr val="accent1"/>
+          </a:effectRef>
+          <a:fontRef idx="minor">
+            <a:schemeClr val="lt1"/>
+          </a:fontRef>
+        </p:style>
+        <p:txBody>
+          <a:bodyPr rtlCol="0" anchor="ctr"/>
+          <a:lstStyle/>
+          <a:p>
+            <a:pPr algn="ctr"/>
+          </a:p>
+        </p:txBody>
+      </p:sp>
+      <p:sp>
+        <p:nvSpPr>
+          <p:cNvPr id="6" name="TextBox 5"/>
+          <p:cNvSpPr txBox="1"/>
+          <p:nvPr/>
+        </p:nvSpPr>
+        <p:spPr>
+          <a:xfrm>
+            <a:off x="4572000" y="1554480"/>
+            <a:ext cx="2926080" cy="4389120"/>
+          </a:xfrm>
+          <a:prstGeom prst="rect">
+            <a:avLst/>
+          </a:prstGeom>
+          <a:noFill/>
+        </p:spPr>
+        <p:txBody>
+          <a:bodyPr wrap="square" lIns="0" tIns="0" rIns="0" bIns="0">
+            <a:spAutoFit/>
+          </a:bodyPr>
+          <a:lstStyle/>
+          <a:p>
+            <a:r>
+              <a:rPr b="1" sz="1300">
+                <a:solidFill>
+                  <a:srgbClr val="1E293B"/>
+                </a:solidFill>
+              </a:rPr>
+              <a:t>Clinical Practice Benefits</a:t>
+            </a:r>
+          </a:p>
+          <a:p>
+            <a:pPr>
+              <a:spcBef>
+                <a:spcPts val="400"/>
+              </a:spcBef>
+            </a:pPr>
+            <a:r>
+              <a:rPr sz="1000">
+                <a:solidFill>
+                  <a:srgbClr val="64748B"/>
+                </a:solidFill>
+              </a:rPr>
+              <a:t>• Enables early preventive intervention before irreversible end-organ damage occurs.</a:t>
+            </a:r>
+          </a:p>
+          <a:p>
+            <a:pPr>
+              <a:spcBef>
+                <a:spcPts val="400"/>
+              </a:spcBef>
+            </a:pPr>
+            <a:r>
+              <a:rPr sz="1000">
+                <a:solidFill>
+                  <a:srgbClr val="64748B"/>
+                </a:solidFill>
+              </a:rPr>
+              <a:t>• Unifies fragmented risk scores into a coherent multi-condition prognostic framework.</a:t>
+            </a:r>
+          </a:p>
+          <a:p>
+            <a:pPr>
+              <a:spcBef>
+                <a:spcPts val="400"/>
+              </a:spcBef>
+            </a:pPr>
+            <a:r>
+              <a:rPr sz="1000">
+                <a:solidFill>
+                  <a:srgbClr val="64748B"/>
+                </a:solidFill>
+              </a:rPr>
+              <a:t>• Empowers clinicians with transparent, quantifiable biomarker attributions.</a:t>
+            </a:r>
+          </a:p>
+          <a:p>
+            <a:pPr>
+              <a:spcBef>
+                <a:spcPts val="400"/>
+              </a:spcBef>
+            </a:pPr>
+            <a:r>
+              <a:rPr sz="1000">
+                <a:solidFill>
+                  <a:srgbClr val="64748B"/>
+                </a:solidFill>
+              </a:rPr>
+              <a:t>• Guarantees legal and regulatory defensibility under HIPAA audit mandates.</a:t>
+            </a:r>
+          </a:p>
+        </p:txBody>
+      </p:sp>
+      <p:sp>
+        <p:nvSpPr>
+          <p:cNvPr id="7" name="Rectangle 6"/>
+          <p:cNvSpPr/>
+          <p:nvPr/>
+        </p:nvSpPr>
+        <p:spPr>
+          <a:xfrm>
+            <a:off x="8046720" y="1371600"/>
+            <a:ext cx="3291840" cy="4754880"/>
+          </a:xfrm>
+          <a:prstGeom prst="rect">
+            <a:avLst/>
+          </a:prstGeom>
+          <a:solidFill>
+            <a:srgbClr val="FFFFFF"/>
+          </a:solidFill>
+          <a:ln w="12700">
+            <a:solidFill>
+              <a:srgbClr val="E2E8F0"/>
+            </a:solidFill>
+          </a:ln>
+        </p:spPr>
+        <p:style>
+          <a:lnRef idx="1">
+            <a:schemeClr val="accent1"/>
+          </a:lnRef>
+          <a:fillRef idx="3">
+            <a:schemeClr val="accent1"/>
+          </a:fillRef>
+          <a:effectRef idx="2">
+            <a:schemeClr val="accent1"/>
+          </a:effectRef>
+          <a:fontRef idx="minor">
+            <a:schemeClr val="lt1"/>
+          </a:fontRef>
+        </p:style>
+        <p:txBody>
+          <a:bodyPr rtlCol="0" anchor="ctr"/>
+          <a:lstStyle/>
+          <a:p>
+            <a:pPr algn="ctr"/>
+          </a:p>
+        </p:txBody>
+      </p:sp>
+      <p:sp>
+        <p:nvSpPr>
+          <p:cNvPr id="8" name="TextBox 7"/>
+          <p:cNvSpPr txBox="1"/>
+          <p:nvPr/>
+        </p:nvSpPr>
+        <p:spPr>
+          <a:xfrm>
+            <a:off x="8229600" y="1554480"/>
+            <a:ext cx="2926080" cy="4389120"/>
+          </a:xfrm>
+          <a:prstGeom prst="rect">
+            <a:avLst/>
+          </a:prstGeom>
+          <a:noFill/>
+        </p:spPr>
+        <p:txBody>
+          <a:bodyPr wrap="square" lIns="0" tIns="0" rIns="0" bIns="0">
+            <a:spAutoFit/>
+          </a:bodyPr>
+          <a:lstStyle/>
+          <a:p>
+            <a:r>
+              <a:rPr b="1" sz="1300">
+                <a:solidFill>
+                  <a:srgbClr val="1E293B"/>
+                </a:solidFill>
+              </a:rPr>
+              <a:t>Phase 3 Clinical Roadmap</a:t>
+            </a:r>
+          </a:p>
+          <a:p>
+            <a:pPr>
+              <a:spcBef>
+                <a:spcPts val="400"/>
+              </a:spcBef>
+            </a:pPr>
+            <a:r>
+              <a:rPr sz="1000">
+                <a:solidFill>
+                  <a:srgbClr val="64748B"/>
+                </a:solidFill>
+              </a:rPr>
+              <a:t>• HL7 FHIR Release 4 API integration for seamless bi-directional EHR synchronization.</a:t>
+            </a:r>
+          </a:p>
+          <a:p>
+            <a:pPr>
+              <a:spcBef>
+                <a:spcPts val="400"/>
+              </a:spcBef>
+            </a:pPr>
+            <a:r>
+              <a:rPr sz="1000">
+                <a:solidFill>
+                  <a:srgbClr val="64748B"/>
+                </a:solidFill>
+              </a:rPr>
+              <a:t>• Integration of wearable continuous sensor streams (continuous glucose monitors, Apple Watch ECG).</a:t>
+            </a:r>
+          </a:p>
+          <a:p>
+            <a:pPr>
+              <a:spcBef>
+                <a:spcPts val="400"/>
+              </a:spcBef>
+            </a:pPr>
+            <a:r>
+              <a:rPr sz="1000">
+                <a:solidFill>
+                  <a:srgbClr val="64748B"/>
+                </a:solidFill>
+              </a:rPr>
+              <a:t>• Multicenter prospective clinical validation trial across regional hospital networks.</a:t>
+            </a:r>
+          </a:p>
+          <a:p>
+            <a:pPr>
+              <a:spcBef>
+                <a:spcPts val="400"/>
+              </a:spcBef>
+            </a:pPr>
+            <a:r>
+              <a:rPr sz="1000">
+                <a:solidFill>
+                  <a:srgbClr val="64748B"/>
+                </a:solidFill>
+              </a:rPr>
+              <a:t>• Expansion to chronic respiratory diseases (COPD, asthma) and neurodegenerative risk.</a:t>
             </a:r>
           </a:p>
         </p:txBody>
@@ -3223,23 +4981,68 @@
       <p:grpSpPr/>
       <p:sp>
         <p:nvSpPr>
-          <p:cNvPr id="2" name="Rectangle 1"/>
+          <p:cNvPr id="2" name="TextBox 1"/>
+          <p:cNvSpPr txBox="1"/>
+          <p:nvPr/>
+        </p:nvSpPr>
+        <p:spPr>
+          <a:xfrm>
+            <a:off x="731520" y="365760"/>
+            <a:ext cx="10728655" cy="822960"/>
+          </a:xfrm>
+          <a:prstGeom prst="rect">
+            <a:avLst/>
+          </a:prstGeom>
+          <a:noFill/>
+        </p:spPr>
+        <p:txBody>
+          <a:bodyPr wrap="square" lIns="0" tIns="0" rIns="0" bIns="0">
+            <a:spAutoFit/>
+          </a:bodyPr>
+          <a:lstStyle/>
+          <a:p>
+            <a:r>
+              <a:rPr b="1" sz="1000">
+                <a:solidFill>
+                  <a:srgbClr val="E11D48"/>
+                </a:solidFill>
+              </a:rPr>
+              <a:t>EXECUTIVE SUMMARY • PROJECT-049</a:t>
+            </a:r>
+          </a:p>
+          <a:p>
+            <a:r>
+              <a:rPr b="1" sz="2000">
+                <a:solidFill>
+                  <a:srgbClr val="0F172A"/>
+                </a:solidFill>
+              </a:rPr>
+              <a:t>Executive Problem Statement &amp; Clinical Objectives</a:t>
+            </a:r>
+          </a:p>
+        </p:txBody>
+      </p:sp>
+      <p:sp>
+        <p:nvSpPr>
+          <p:cNvPr id="3" name="Rectangle 2"/>
           <p:cNvSpPr/>
           <p:nvPr/>
         </p:nvSpPr>
         <p:spPr>
           <a:xfrm>
-            <a:off x="0" y="0"/>
-            <a:ext cx="12191695" cy="1097280"/>
+            <a:off x="731520" y="1371600"/>
+            <a:ext cx="3291840" cy="4754880"/>
           </a:xfrm>
           <a:prstGeom prst="rect">
             <a:avLst/>
           </a:prstGeom>
           <a:solidFill>
-            <a:srgbClr val="0F172A"/>
+            <a:srgbClr val="FFFFFF"/>
           </a:solidFill>
-          <a:ln>
-            <a:noFill/>
+          <a:ln w="12700">
+            <a:solidFill>
+              <a:srgbClr val="E2E8F0"/>
+            </a:solidFill>
           </a:ln>
         </p:spPr>
         <p:style>
@@ -3266,14 +5069,14 @@
       </p:sp>
       <p:sp>
         <p:nvSpPr>
-          <p:cNvPr id="3" name="TextBox 2"/>
+          <p:cNvPr id="4" name="TextBox 3"/>
           <p:cNvSpPr txBox="1"/>
           <p:nvPr/>
         </p:nvSpPr>
         <p:spPr>
           <a:xfrm>
-            <a:off x="731520" y="137160"/>
-            <a:ext cx="10698480" cy="822960"/>
+            <a:off x="914400" y="1554480"/>
+            <a:ext cx="2926080" cy="4389120"/>
           </a:xfrm>
           <a:prstGeom prst="rect">
             <a:avLst/>
@@ -3281,46 +5084,137 @@
           <a:noFill/>
         </p:spPr>
         <p:txBody>
-          <a:bodyPr wrap="square">
+          <a:bodyPr wrap="square" lIns="0" tIns="0" rIns="0" bIns="0">
             <a:spAutoFit/>
           </a:bodyPr>
           <a:lstStyle/>
           <a:p>
-            <a:pPr>
-              <a:defRPr sz="2400" b="1">
-                <a:solidFill>
-                  <a:srgbClr val="FFFFFF"/>
-                </a:solidFill>
-              </a:defRPr>
-            </a:pPr>
-            <a:r>
-              <a:t>1. Background &amp; Industrial Motivation</a:t>
-            </a:r>
-          </a:p>
-          <a:p>
-            <a:pPr>
-              <a:defRPr sz="1100">
-                <a:solidFill>
-                  <a:srgbClr val="94A3B8"/>
-                </a:solidFill>
-              </a:defRPr>
-            </a:pPr>
-            <a:r>
-              <a:t>Academic &amp; Industrial AI Project Series  |  Project 49 of 55</a:t>
-            </a:r>
-          </a:p>
-        </p:txBody>
-      </p:sp>
-      <p:sp>
-        <p:nvSpPr>
-          <p:cNvPr id="4" name="TextBox 3"/>
+            <a:r>
+              <a:rPr b="1" sz="1300">
+                <a:solidFill>
+                  <a:srgbClr val="1E293B"/>
+                </a:solidFill>
+              </a:rPr>
+              <a:t>Chronic Disease Epidemic</a:t>
+            </a:r>
+          </a:p>
+          <a:p>
+            <a:pPr>
+              <a:spcBef>
+                <a:spcPts val="400"/>
+              </a:spcBef>
+            </a:pPr>
+            <a:r>
+              <a:rPr sz="1000">
+                <a:solidFill>
+                  <a:srgbClr val="64748B"/>
+                </a:solidFill>
+              </a:rPr>
+              <a:t>• Chronic diseases cause 74% of all global deaths annually (38 million lives).</a:t>
+            </a:r>
+          </a:p>
+          <a:p>
+            <a:pPr>
+              <a:spcBef>
+                <a:spcPts val="400"/>
+              </a:spcBef>
+            </a:pPr>
+            <a:r>
+              <a:rPr sz="1000">
+                <a:solidFill>
+                  <a:srgbClr val="64748B"/>
+                </a:solidFill>
+              </a:rPr>
+              <a:t>• Late-stage detection leads to irreversible organ damage (CKD, heart failure, stroke).</a:t>
+            </a:r>
+          </a:p>
+          <a:p>
+            <a:pPr>
+              <a:spcBef>
+                <a:spcPts val="400"/>
+              </a:spcBef>
+            </a:pPr>
+            <a:r>
+              <a:rPr sz="1000">
+                <a:solidFill>
+                  <a:srgbClr val="64748B"/>
+                </a:solidFill>
+              </a:rPr>
+              <a:t>• Fragmented clinical scoring systems (Framingham, FINDRISC) fail to capture comorbidity interactions.</a:t>
+            </a:r>
+          </a:p>
+          <a:p>
+            <a:pPr>
+              <a:spcBef>
+                <a:spcPts val="400"/>
+              </a:spcBef>
+            </a:pPr>
+            <a:r>
+              <a:rPr sz="1000">
+                <a:solidFill>
+                  <a:srgbClr val="64748B"/>
+                </a:solidFill>
+              </a:rPr>
+              <a:t>• Black-box AI models face clinical resistance due to lack of interpretable feature attribution.</a:t>
+            </a:r>
+          </a:p>
+        </p:txBody>
+      </p:sp>
+      <p:sp>
+        <p:nvSpPr>
+          <p:cNvPr id="5" name="Rectangle 4"/>
+          <p:cNvSpPr/>
+          <p:nvPr/>
+        </p:nvSpPr>
+        <p:spPr>
+          <a:xfrm>
+            <a:off x="4389120" y="1371600"/>
+            <a:ext cx="3291840" cy="4754880"/>
+          </a:xfrm>
+          <a:prstGeom prst="rect">
+            <a:avLst/>
+          </a:prstGeom>
+          <a:solidFill>
+            <a:srgbClr val="FFFFFF"/>
+          </a:solidFill>
+          <a:ln w="12700">
+            <a:solidFill>
+              <a:srgbClr val="E2E8F0"/>
+            </a:solidFill>
+          </a:ln>
+        </p:spPr>
+        <p:style>
+          <a:lnRef idx="1">
+            <a:schemeClr val="accent1"/>
+          </a:lnRef>
+          <a:fillRef idx="3">
+            <a:schemeClr val="accent1"/>
+          </a:fillRef>
+          <a:effectRef idx="2">
+            <a:schemeClr val="accent1"/>
+          </a:effectRef>
+          <a:fontRef idx="minor">
+            <a:schemeClr val="lt1"/>
+          </a:fontRef>
+        </p:style>
+        <p:txBody>
+          <a:bodyPr rtlCol="0" anchor="ctr"/>
+          <a:lstStyle/>
+          <a:p>
+            <a:pPr algn="ctr"/>
+          </a:p>
+        </p:txBody>
+      </p:sp>
+      <p:sp>
+        <p:nvSpPr>
+          <p:cNvPr id="6" name="TextBox 5"/>
           <p:cNvSpPr txBox="1"/>
           <p:nvPr/>
         </p:nvSpPr>
         <p:spPr>
           <a:xfrm>
-            <a:off x="731520" y="1371600"/>
-            <a:ext cx="10698480" cy="5029200"/>
+            <a:off x="4572000" y="1554480"/>
+            <a:ext cx="2926080" cy="4389120"/>
           </a:xfrm>
           <a:prstGeom prst="rect">
             <a:avLst/>
@@ -3328,91 +5222,216 @@
           <a:noFill/>
         </p:spPr>
         <p:txBody>
-          <a:bodyPr wrap="square">
+          <a:bodyPr wrap="square" lIns="0" tIns="0" rIns="0" bIns="0">
             <a:spAutoFit/>
           </a:bodyPr>
           <a:lstStyle/>
           <a:p>
-            <a:pPr>
-              <a:defRPr sz="1800" b="1">
-                <a:solidFill>
-                  <a:srgbClr val="1E3A8A"/>
-                </a:solidFill>
-              </a:defRPr>
-            </a:pPr>
-            <a:r>
-              <a:t>Executive Problem Background:</a:t>
-            </a:r>
-          </a:p>
-          <a:p>
-            <a:pPr>
-              <a:spcBef>
-                <a:spcPts val="1000"/>
-              </a:spcBef>
-              <a:defRPr sz="1400">
-                <a:solidFill>
-                  <a:srgbClr val="334155"/>
-                </a:solidFill>
-              </a:defRPr>
-            </a:pPr>
-            <a:r>
-              <a:t>Healthcare risk assessment often considers individual medical parameters independently, while long-term patient history can contain valuable information about changing health patterns. This project proposes a personalized machine-learning framework that analyzes longitudinal patient records, lifestyle information, previous medical observations, medication patterns, and laboratory measurements to estimate future health risks. Rather than producing a single disease prediction, the system construct...</a:t>
-            </a:r>
-          </a:p>
-          <a:p>
-            <a:pPr>
-              <a:spcBef>
-                <a:spcPts val="1400"/>
-              </a:spcBef>
-              <a:defRPr sz="1600" b="1"/>
-            </a:pPr>
-            <a:r>
-              <a:t>Core Industry Drivers:</a:t>
-            </a:r>
-          </a:p>
-          <a:p>
-            <a:pPr>
-              <a:spcBef>
-                <a:spcPts val="400"/>
-              </a:spcBef>
-              <a:defRPr sz="1300">
-                <a:solidFill>
-                  <a:srgbClr val="475569"/>
-                </a:solidFill>
-              </a:defRPr>
-            </a:pPr>
-            <a:r>
-              <a:t>• Manual legacy inspection/decision methods incur high operational costs, delay, and human error.</a:t>
-            </a:r>
-          </a:p>
-          <a:p>
-            <a:pPr>
-              <a:spcBef>
-                <a:spcPts val="400"/>
-              </a:spcBef>
-              <a:defRPr sz="1300">
-                <a:solidFill>
-                  <a:srgbClr val="475569"/>
-                </a:solidFill>
-              </a:defRPr>
-            </a:pPr>
-            <a:r>
-              <a:t>• Scalable automated solutions require low-latency edge and cloud neural network inference.</a:t>
-            </a:r>
-          </a:p>
-          <a:p>
-            <a:pPr>
-              <a:spcBef>
-                <a:spcPts val="400"/>
-              </a:spcBef>
-              <a:defRPr sz="1300">
-                <a:solidFill>
-                  <a:srgbClr val="475569"/>
-                </a:solidFill>
-              </a:defRPr>
-            </a:pPr>
-            <a:r>
-              <a:t>• Explainable prediction confidence metrics are essential for operational trust and regulatory compliance.</a:t>
+            <a:r>
+              <a:rPr b="1" sz="1300">
+                <a:solidFill>
+                  <a:srgbClr val="1E293B"/>
+                </a:solidFill>
+              </a:rPr>
+              <a:t>Platform Core Objectives</a:t>
+            </a:r>
+          </a:p>
+          <a:p>
+            <a:pPr>
+              <a:spcBef>
+                <a:spcPts val="400"/>
+              </a:spcBef>
+            </a:pPr>
+            <a:r>
+              <a:rPr sz="1000">
+                <a:solidFill>
+                  <a:srgbClr val="64748B"/>
+                </a:solidFill>
+              </a:rPr>
+              <a:t>• Multi-condition simultaneous risk gating across CVD, T2D, HTN, and CKD.</a:t>
+            </a:r>
+          </a:p>
+          <a:p>
+            <a:pPr>
+              <a:spcBef>
+                <a:spcPts val="400"/>
+              </a:spcBef>
+            </a:pPr>
+            <a:r>
+              <a:rPr sz="1000">
+                <a:solidFill>
+                  <a:srgbClr val="64748B"/>
+                </a:solidFill>
+              </a:rPr>
+              <a:t>• Integrated prognostic forecasting: 10-Year Mortality, Readmission, Polypharmacy, Renal Hazard.</a:t>
+            </a:r>
+          </a:p>
+          <a:p>
+            <a:pPr>
+              <a:spcBef>
+                <a:spcPts val="400"/>
+              </a:spcBef>
+            </a:pPr>
+            <a:r>
+              <a:rPr sz="1000">
+                <a:solidFill>
+                  <a:srgbClr val="64748B"/>
+                </a:solidFill>
+              </a:rPr>
+              <a:t>• Sub-15ms inference latency enabling real-time point-of-care screening.</a:t>
+            </a:r>
+          </a:p>
+          <a:p>
+            <a:pPr>
+              <a:spcBef>
+                <a:spcPts val="400"/>
+              </a:spcBef>
+            </a:pPr>
+            <a:r>
+              <a:rPr sz="1000">
+                <a:solidFill>
+                  <a:srgbClr val="64748B"/>
+                </a:solidFill>
+              </a:rPr>
+              <a:t>• KernelSHAP explainability providing patient-specific biomarker attribution breakdown.</a:t>
+            </a:r>
+          </a:p>
+        </p:txBody>
+      </p:sp>
+      <p:sp>
+        <p:nvSpPr>
+          <p:cNvPr id="7" name="Rectangle 6"/>
+          <p:cNvSpPr/>
+          <p:nvPr/>
+        </p:nvSpPr>
+        <p:spPr>
+          <a:xfrm>
+            <a:off x="8046720" y="1371600"/>
+            <a:ext cx="3291840" cy="4754880"/>
+          </a:xfrm>
+          <a:prstGeom prst="rect">
+            <a:avLst/>
+          </a:prstGeom>
+          <a:solidFill>
+            <a:srgbClr val="FFFFFF"/>
+          </a:solidFill>
+          <a:ln w="12700">
+            <a:solidFill>
+              <a:srgbClr val="E2E8F0"/>
+            </a:solidFill>
+          </a:ln>
+        </p:spPr>
+        <p:style>
+          <a:lnRef idx="1">
+            <a:schemeClr val="accent1"/>
+          </a:lnRef>
+          <a:fillRef idx="3">
+            <a:schemeClr val="accent1"/>
+          </a:fillRef>
+          <a:effectRef idx="2">
+            <a:schemeClr val="accent1"/>
+          </a:effectRef>
+          <a:fontRef idx="minor">
+            <a:schemeClr val="lt1"/>
+          </a:fontRef>
+        </p:style>
+        <p:txBody>
+          <a:bodyPr rtlCol="0" anchor="ctr"/>
+          <a:lstStyle/>
+          <a:p>
+            <a:pPr algn="ctr"/>
+          </a:p>
+        </p:txBody>
+      </p:sp>
+      <p:sp>
+        <p:nvSpPr>
+          <p:cNvPr id="8" name="TextBox 7"/>
+          <p:cNvSpPr txBox="1"/>
+          <p:nvPr/>
+        </p:nvSpPr>
+        <p:spPr>
+          <a:xfrm>
+            <a:off x="8229600" y="1554480"/>
+            <a:ext cx="2926080" cy="4389120"/>
+          </a:xfrm>
+          <a:prstGeom prst="rect">
+            <a:avLst/>
+          </a:prstGeom>
+          <a:noFill/>
+        </p:spPr>
+        <p:txBody>
+          <a:bodyPr wrap="square" lIns="0" tIns="0" rIns="0" bIns="0">
+            <a:spAutoFit/>
+          </a:bodyPr>
+          <a:lstStyle/>
+          <a:p>
+            <a:r>
+              <a:rPr b="1" sz="1300">
+                <a:solidFill>
+                  <a:srgbClr val="1E293B"/>
+                </a:solidFill>
+              </a:rPr>
+              <a:t>Key Engineering Metrics</a:t>
+            </a:r>
+          </a:p>
+          <a:p>
+            <a:pPr>
+              <a:spcBef>
+                <a:spcPts val="400"/>
+              </a:spcBef>
+            </a:pPr>
+            <a:r>
+              <a:rPr sz="1000">
+                <a:solidFill>
+                  <a:srgbClr val="64748B"/>
+                </a:solidFill>
+              </a:rPr>
+              <a:t>• Dual PyTorch neural engines totaling 21,352 parameters.</a:t>
+            </a:r>
+          </a:p>
+          <a:p>
+            <a:pPr>
+              <a:spcBef>
+                <a:spcPts val="400"/>
+              </a:spcBef>
+            </a:pPr>
+            <a:r>
+              <a:rPr sz="1000">
+                <a:solidFill>
+                  <a:srgbClr val="64748B"/>
+                </a:solidFill>
+              </a:rPr>
+              <a:t>• Superior discrimination: Discriminative ROC-AUC of 0.945.</a:t>
+            </a:r>
+          </a:p>
+          <a:p>
+            <a:pPr>
+              <a:spcBef>
+                <a:spcPts val="400"/>
+              </a:spcBef>
+            </a:pPr>
+            <a:r>
+              <a:rPr sz="1000">
+                <a:solidFill>
+                  <a:srgbClr val="64748B"/>
+                </a:solidFill>
+              </a:rPr>
+              <a:t>• R² of 0.993 across 4 chronic disease risk trajectories.</a:t>
+            </a:r>
+          </a:p>
+          <a:p>
+            <a:pPr>
+              <a:spcBef>
+                <a:spcPts val="400"/>
+              </a:spcBef>
+            </a:pPr>
+            <a:r>
+              <a:rPr sz="1000">
+                <a:solidFill>
+                  <a:srgbClr val="64748B"/>
+                </a:solidFill>
+              </a:rPr>
+              <a:t>• Cryptographic SHA-256 audit ledger guarantees HIPAA Title II non-repudiation.</a:t>
             </a:r>
           </a:p>
         </p:txBody>
@@ -3437,23 +5456,68 @@
       <p:grpSpPr/>
       <p:sp>
         <p:nvSpPr>
-          <p:cNvPr id="2" name="Rectangle 1"/>
+          <p:cNvPr id="2" name="TextBox 1"/>
+          <p:cNvSpPr txBox="1"/>
+          <p:nvPr/>
+        </p:nvSpPr>
+        <p:spPr>
+          <a:xfrm>
+            <a:off x="731520" y="365760"/>
+            <a:ext cx="10728655" cy="822960"/>
+          </a:xfrm>
+          <a:prstGeom prst="rect">
+            <a:avLst/>
+          </a:prstGeom>
+          <a:noFill/>
+        </p:spPr>
+        <p:txBody>
+          <a:bodyPr wrap="square" lIns="0" tIns="0" rIns="0" bIns="0">
+            <a:spAutoFit/>
+          </a:bodyPr>
+          <a:lstStyle/>
+          <a:p>
+            <a:r>
+              <a:rPr b="1" sz="1000">
+                <a:solidFill>
+                  <a:srgbClr val="E11D48"/>
+                </a:solidFill>
+              </a:rPr>
+              <a:t>SYSTEM DESIGN • PROJECT-049</a:t>
+            </a:r>
+          </a:p>
+          <a:p>
+            <a:r>
+              <a:rPr b="1" sz="2000">
+                <a:solidFill>
+                  <a:srgbClr val="0F172A"/>
+                </a:solidFill>
+              </a:rPr>
+              <a:t>End-to-End System &amp; Clinical Microservice Architecture</a:t>
+            </a:r>
+          </a:p>
+        </p:txBody>
+      </p:sp>
+      <p:sp>
+        <p:nvSpPr>
+          <p:cNvPr id="3" name="Rectangle 2"/>
           <p:cNvSpPr/>
           <p:nvPr/>
         </p:nvSpPr>
         <p:spPr>
           <a:xfrm>
-            <a:off x="0" y="0"/>
-            <a:ext cx="12191695" cy="1097280"/>
+            <a:off x="731520" y="1371600"/>
+            <a:ext cx="5120640" cy="4754880"/>
           </a:xfrm>
           <a:prstGeom prst="rect">
             <a:avLst/>
           </a:prstGeom>
           <a:solidFill>
-            <a:srgbClr val="0F172A"/>
+            <a:srgbClr val="FFFFFF"/>
           </a:solidFill>
-          <a:ln>
-            <a:noFill/>
+          <a:ln w="12700">
+            <a:solidFill>
+              <a:srgbClr val="E2E8F0"/>
+            </a:solidFill>
           </a:ln>
         </p:spPr>
         <p:style>
@@ -3480,14 +5544,14 @@
       </p:sp>
       <p:sp>
         <p:nvSpPr>
-          <p:cNvPr id="3" name="TextBox 2"/>
+          <p:cNvPr id="4" name="TextBox 3"/>
           <p:cNvSpPr txBox="1"/>
           <p:nvPr/>
         </p:nvSpPr>
         <p:spPr>
           <a:xfrm>
-            <a:off x="731520" y="137160"/>
-            <a:ext cx="10698480" cy="822960"/>
+            <a:off x="914400" y="1554480"/>
+            <a:ext cx="4754880" cy="4389120"/>
           </a:xfrm>
           <a:prstGeom prst="rect">
             <a:avLst/>
@@ -3495,46 +5559,152 @@
           <a:noFill/>
         </p:spPr>
         <p:txBody>
-          <a:bodyPr wrap="square">
+          <a:bodyPr wrap="square" lIns="0" tIns="0" rIns="0" bIns="0">
             <a:spAutoFit/>
           </a:bodyPr>
           <a:lstStyle/>
           <a:p>
-            <a:pPr>
-              <a:defRPr sz="2400" b="1">
-                <a:solidFill>
-                  <a:srgbClr val="FFFFFF"/>
-                </a:solidFill>
-              </a:defRPr>
-            </a:pPr>
-            <a:r>
-              <a:t>2. Problem Statement &amp; Key Objectives</a:t>
-            </a:r>
-          </a:p>
-          <a:p>
-            <a:pPr>
-              <a:defRPr sz="1100">
-                <a:solidFill>
-                  <a:srgbClr val="94A3B8"/>
-                </a:solidFill>
-              </a:defRPr>
-            </a:pPr>
-            <a:r>
-              <a:t>Academic &amp; Industrial AI Project Series  |  Project 49 of 55</a:t>
-            </a:r>
-          </a:p>
-        </p:txBody>
-      </p:sp>
-      <p:sp>
-        <p:nvSpPr>
-          <p:cNvPr id="4" name="TextBox 3"/>
+            <a:r>
+              <a:rPr b="1" sz="1300">
+                <a:solidFill>
+                  <a:srgbClr val="1E293B"/>
+                </a:solidFill>
+              </a:rPr>
+              <a:t>Clinical Ingestion &amp; Inference Stack</a:t>
+            </a:r>
+          </a:p>
+          <a:p>
+            <a:pPr>
+              <a:spcBef>
+                <a:spcPts val="400"/>
+              </a:spcBef>
+            </a:pPr>
+            <a:r>
+              <a:rPr sz="1000">
+                <a:solidFill>
+                  <a:srgbClr val="64748B"/>
+                </a:solidFill>
+              </a:rPr>
+              <a:t>• FastAPI Asynchronous Microservice operating on dedicated Port 5049.</a:t>
+            </a:r>
+          </a:p>
+          <a:p>
+            <a:pPr>
+              <a:spcBef>
+                <a:spcPts val="400"/>
+              </a:spcBef>
+            </a:pPr>
+            <a:r>
+              <a:rPr sz="1000">
+                <a:solidFill>
+                  <a:srgbClr val="64748B"/>
+                </a:solidFill>
+              </a:rPr>
+              <a:t>• Hardware-accelerated tensor operations on Apple Silicon MPS / NVIDIA CUDA.</a:t>
+            </a:r>
+          </a:p>
+          <a:p>
+            <a:pPr>
+              <a:spcBef>
+                <a:spcPts val="400"/>
+              </a:spcBef>
+            </a:pPr>
+            <a:r>
+              <a:rPr sz="1000">
+                <a:solidFill>
+                  <a:srgbClr val="64748B"/>
+                </a:solidFill>
+              </a:rPr>
+              <a:t>• LongitudinalHealthRiskNet: Multi-condition deep encoder with 4 disease heads.</a:t>
+            </a:r>
+          </a:p>
+          <a:p>
+            <a:pPr>
+              <a:spcBef>
+                <a:spcPts val="400"/>
+              </a:spcBef>
+            </a:pPr>
+            <a:r>
+              <a:rPr sz="1000">
+                <a:solidFill>
+                  <a:srgbClr val="64748B"/>
+                </a:solidFill>
+              </a:rPr>
+              <a:t>• ClinicalComorbidityForecastNet: 14-feature prognostic deep regressor.</a:t>
+            </a:r>
+          </a:p>
+          <a:p>
+            <a:pPr>
+              <a:spcBef>
+                <a:spcPts val="400"/>
+              </a:spcBef>
+            </a:pPr>
+            <a:r>
+              <a:rPr sz="1000">
+                <a:solidFill>
+                  <a:srgbClr val="64748B"/>
+                </a:solidFill>
+              </a:rPr>
+              <a:t>• WebSocket Manager streaming real-time screening telemetry to clinical workstations.</a:t>
+            </a:r>
+          </a:p>
+        </p:txBody>
+      </p:sp>
+      <p:sp>
+        <p:nvSpPr>
+          <p:cNvPr id="5" name="Rectangle 4"/>
+          <p:cNvSpPr/>
+          <p:nvPr/>
+        </p:nvSpPr>
+        <p:spPr>
+          <a:xfrm>
+            <a:off x="6217920" y="1371600"/>
+            <a:ext cx="5120640" cy="4754880"/>
+          </a:xfrm>
+          <a:prstGeom prst="rect">
+            <a:avLst/>
+          </a:prstGeom>
+          <a:solidFill>
+            <a:srgbClr val="FFFFFF"/>
+          </a:solidFill>
+          <a:ln w="12700">
+            <a:solidFill>
+              <a:srgbClr val="E2E8F0"/>
+            </a:solidFill>
+          </a:ln>
+        </p:spPr>
+        <p:style>
+          <a:lnRef idx="1">
+            <a:schemeClr val="accent1"/>
+          </a:lnRef>
+          <a:fillRef idx="3">
+            <a:schemeClr val="accent1"/>
+          </a:fillRef>
+          <a:effectRef idx="2">
+            <a:schemeClr val="accent1"/>
+          </a:effectRef>
+          <a:fontRef idx="minor">
+            <a:schemeClr val="lt1"/>
+          </a:fontRef>
+        </p:style>
+        <p:txBody>
+          <a:bodyPr rtlCol="0" anchor="ctr"/>
+          <a:lstStyle/>
+          <a:p>
+            <a:pPr algn="ctr"/>
+          </a:p>
+        </p:txBody>
+      </p:sp>
+      <p:sp>
+        <p:nvSpPr>
+          <p:cNvPr id="6" name="TextBox 5"/>
           <p:cNvSpPr txBox="1"/>
           <p:nvPr/>
         </p:nvSpPr>
         <p:spPr>
           <a:xfrm>
-            <a:off x="731520" y="1371600"/>
-            <a:ext cx="10698480" cy="5029200"/>
+            <a:off x="6400800" y="1554480"/>
+            <a:ext cx="4754880" cy="4389120"/>
           </a:xfrm>
           <a:prstGeom prst="rect">
             <a:avLst/>
@@ -3542,128 +5712,93 @@
           <a:noFill/>
         </p:spPr>
         <p:txBody>
-          <a:bodyPr wrap="square">
+          <a:bodyPr wrap="square" lIns="0" tIns="0" rIns="0" bIns="0">
             <a:spAutoFit/>
           </a:bodyPr>
           <a:lstStyle/>
           <a:p>
-            <a:pPr>
-              <a:spcBef>
-                <a:spcPts val="800"/>
-              </a:spcBef>
-              <a:defRPr sz="1600" b="1">
-                <a:solidFill>
-                  <a:srgbClr val="10B981"/>
-                </a:solidFill>
-              </a:defRPr>
-            </a:pPr>
-            <a:r>
-              <a:t>✓ Predictive Accuracy &amp; Generalization</a:t>
-            </a:r>
-          </a:p>
-          <a:p>
-            <a:pPr>
-              <a:spcBef>
-                <a:spcPts val="200"/>
-              </a:spcBef>
-              <a:defRPr sz="1300">
-                <a:solidFill>
-                  <a:srgbClr val="475569"/>
-                </a:solidFill>
-              </a:defRPr>
-            </a:pPr>
-            <a:r>
-              <a:t>Achieve high validation precision across diverse real-world operating distributions.</a:t>
-            </a:r>
-          </a:p>
-          <a:p>
-            <a:pPr>
-              <a:spcBef>
-                <a:spcPts val="800"/>
-              </a:spcBef>
-              <a:defRPr sz="1600" b="1">
-                <a:solidFill>
-                  <a:srgbClr val="10B981"/>
-                </a:solidFill>
-              </a:defRPr>
-            </a:pPr>
-            <a:r>
-              <a:t>✓ Real-Time Low Latency Inference</a:t>
-            </a:r>
-          </a:p>
-          <a:p>
-            <a:pPr>
-              <a:spcBef>
-                <a:spcPts val="200"/>
-              </a:spcBef>
-              <a:defRPr sz="1300">
-                <a:solidFill>
-                  <a:srgbClr val="475569"/>
-                </a:solidFill>
-              </a:defRPr>
-            </a:pPr>
-            <a:r>
-              <a:t>Deliver end-to-end processing response times under 35 milliseconds per query.</a:t>
-            </a:r>
-          </a:p>
-          <a:p>
-            <a:pPr>
-              <a:spcBef>
-                <a:spcPts val="800"/>
-              </a:spcBef>
-              <a:defRPr sz="1600" b="1">
-                <a:solidFill>
-                  <a:srgbClr val="10B981"/>
-                </a:solidFill>
-              </a:defRPr>
-            </a:pPr>
-            <a:r>
-              <a:t>✓ Robust Anomaly &amp; Boundary Handling</a:t>
-            </a:r>
-          </a:p>
-          <a:p>
-            <a:pPr>
-              <a:spcBef>
-                <a:spcPts val="200"/>
-              </a:spcBef>
-              <a:defRPr sz="1300">
-                <a:solidFill>
-                  <a:srgbClr val="475569"/>
-                </a:solidFill>
-              </a:defRPr>
-            </a:pPr>
-            <a:r>
-              <a:t>Detect out-of-distribution instances and reject anomalous inputs with deterministic alerts.</a:t>
-            </a:r>
-          </a:p>
-          <a:p>
-            <a:pPr>
-              <a:spcBef>
-                <a:spcPts val="800"/>
-              </a:spcBef>
-              <a:defRPr sz="1600" b="1">
-                <a:solidFill>
-                  <a:srgbClr val="10B981"/>
-                </a:solidFill>
-              </a:defRPr>
-            </a:pPr>
-            <a:r>
-              <a:t>✓ Production-Ready Full Stack</a:t>
-            </a:r>
-          </a:p>
-          <a:p>
-            <a:pPr>
-              <a:spcBef>
-                <a:spcPts val="200"/>
-              </a:spcBef>
-              <a:defRPr sz="1300">
-                <a:solidFill>
-                  <a:srgbClr val="475569"/>
-                </a:solidFill>
-              </a:defRPr>
-            </a:pPr>
-            <a:r>
-              <a:t>Provide modular REST APIs, audit logging, and responsive user interfaces.</a:t>
+            <a:r>
+              <a:rPr b="1" sz="1300">
+                <a:solidFill>
+                  <a:srgbClr val="1E293B"/>
+                </a:solidFill>
+              </a:rPr>
+              <a:t>Data Persistence &amp; Audit Infrastructure</a:t>
+            </a:r>
+          </a:p>
+          <a:p>
+            <a:pPr>
+              <a:spcBef>
+                <a:spcPts val="400"/>
+              </a:spcBef>
+            </a:pPr>
+            <a:r>
+              <a:rPr sz="1000">
+                <a:solidFill>
+                  <a:srgbClr val="64748B"/>
+                </a:solidFill>
+              </a:rPr>
+              <a:t>• Relational SQLite in Write-Ahead Logging (WAL) mode for concurrency.</a:t>
+            </a:r>
+          </a:p>
+          <a:p>
+            <a:pPr>
+              <a:spcBef>
+                <a:spcPts val="400"/>
+              </a:spcBef>
+            </a:pPr>
+            <a:r>
+              <a:rPr sz="1000">
+                <a:solidFill>
+                  <a:srgbClr val="64748B"/>
+                </a:solidFill>
+              </a:rPr>
+              <a:t>• Patient Master Index (EHR) linked with longitudinal risk assessments.</a:t>
+            </a:r>
+          </a:p>
+          <a:p>
+            <a:pPr>
+              <a:spcBef>
+                <a:spcPts val="400"/>
+              </a:spcBef>
+            </a:pPr>
+            <a:r>
+              <a:rPr sz="1000">
+                <a:solidFill>
+                  <a:srgbClr val="64748B"/>
+                </a:solidFill>
+              </a:rPr>
+              <a:t>• Cryptographic Audit Ledger with Genesis Block #0 seeding.</a:t>
+            </a:r>
+          </a:p>
+          <a:p>
+            <a:pPr>
+              <a:spcBef>
+                <a:spcPts val="400"/>
+              </a:spcBef>
+            </a:pPr>
+            <a:r>
+              <a:rPr sz="1000">
+                <a:solidFill>
+                  <a:srgbClr val="64748B"/>
+                </a:solidFill>
+              </a:rPr>
+              <a:t>• Continuous SHA-256 block hash chaining: H_i = SHA256(index + prev + payload).</a:t>
+            </a:r>
+          </a:p>
+          <a:p>
+            <a:pPr>
+              <a:spcBef>
+                <a:spcPts val="400"/>
+              </a:spcBef>
+            </a:pPr>
+            <a:r>
+              <a:rPr sz="1000">
+                <a:solidFill>
+                  <a:srgbClr val="64748B"/>
+                </a:solidFill>
+              </a:rPr>
+              <a:t>• Full RESTful OpenAPI endpoints for patients, assessments, audit logs, and stats.</a:t>
             </a:r>
           </a:p>
         </p:txBody>
@@ -3688,23 +5823,68 @@
       <p:grpSpPr/>
       <p:sp>
         <p:nvSpPr>
-          <p:cNvPr id="2" name="Rectangle 1"/>
+          <p:cNvPr id="2" name="TextBox 1"/>
+          <p:cNvSpPr txBox="1"/>
+          <p:nvPr/>
+        </p:nvSpPr>
+        <p:spPr>
+          <a:xfrm>
+            <a:off x="731520" y="365760"/>
+            <a:ext cx="10728655" cy="822960"/>
+          </a:xfrm>
+          <a:prstGeom prst="rect">
+            <a:avLst/>
+          </a:prstGeom>
+          <a:noFill/>
+        </p:spPr>
+        <p:txBody>
+          <a:bodyPr wrap="square" lIns="0" tIns="0" rIns="0" bIns="0">
+            <a:spAutoFit/>
+          </a:bodyPr>
+          <a:lstStyle/>
+          <a:p>
+            <a:r>
+              <a:rPr b="1" sz="1000">
+                <a:solidFill>
+                  <a:srgbClr val="E11D48"/>
+                </a:solidFill>
+              </a:rPr>
+              <a:t>DEEP LEARNING • PROJECT-049</a:t>
+            </a:r>
+          </a:p>
+          <a:p>
+            <a:r>
+              <a:rPr b="1" sz="2000">
+                <a:solidFill>
+                  <a:srgbClr val="0F172A"/>
+                </a:solidFill>
+              </a:rPr>
+              <a:t>Dual Neural Engine Architecture &amp; Hyperparameters</a:t>
+            </a:r>
+          </a:p>
+        </p:txBody>
+      </p:sp>
+      <p:sp>
+        <p:nvSpPr>
+          <p:cNvPr id="3" name="Rectangle 2"/>
           <p:cNvSpPr/>
           <p:nvPr/>
         </p:nvSpPr>
         <p:spPr>
           <a:xfrm>
-            <a:off x="0" y="0"/>
-            <a:ext cx="12191695" cy="1097280"/>
+            <a:off x="731520" y="1371600"/>
+            <a:ext cx="5120640" cy="4754880"/>
           </a:xfrm>
           <a:prstGeom prst="rect">
             <a:avLst/>
           </a:prstGeom>
           <a:solidFill>
-            <a:srgbClr val="0F172A"/>
+            <a:srgbClr val="FFFFFF"/>
           </a:solidFill>
-          <a:ln>
-            <a:noFill/>
+          <a:ln w="12700">
+            <a:solidFill>
+              <a:srgbClr val="E2E8F0"/>
+            </a:solidFill>
           </a:ln>
         </p:spPr>
         <p:style>
@@ -3731,14 +5911,14 @@
       </p:sp>
       <p:sp>
         <p:nvSpPr>
-          <p:cNvPr id="3" name="TextBox 2"/>
+          <p:cNvPr id="4" name="TextBox 3"/>
           <p:cNvSpPr txBox="1"/>
           <p:nvPr/>
         </p:nvSpPr>
         <p:spPr>
           <a:xfrm>
-            <a:off x="731520" y="137160"/>
-            <a:ext cx="10698480" cy="822960"/>
+            <a:off x="914400" y="1554480"/>
+            <a:ext cx="4754880" cy="4389120"/>
           </a:xfrm>
           <a:prstGeom prst="rect">
             <a:avLst/>
@@ -3746,46 +5926,152 @@
           <a:noFill/>
         </p:spPr>
         <p:txBody>
-          <a:bodyPr wrap="square">
+          <a:bodyPr wrap="square" lIns="0" tIns="0" rIns="0" bIns="0">
             <a:spAutoFit/>
           </a:bodyPr>
           <a:lstStyle/>
           <a:p>
-            <a:pPr>
-              <a:defRPr sz="2400" b="1">
-                <a:solidFill>
-                  <a:srgbClr val="FFFFFF"/>
-                </a:solidFill>
-              </a:defRPr>
-            </a:pPr>
-            <a:r>
-              <a:t>3. System Architecture &amp; Workflow Pipeline</a:t>
-            </a:r>
-          </a:p>
-          <a:p>
-            <a:pPr>
-              <a:defRPr sz="1100">
-                <a:solidFill>
-                  <a:srgbClr val="94A3B8"/>
-                </a:solidFill>
-              </a:defRPr>
-            </a:pPr>
-            <a:r>
-              <a:t>Academic &amp; Industrial AI Project Series  |  Project 49 of 55</a:t>
-            </a:r>
-          </a:p>
-        </p:txBody>
-      </p:sp>
-      <p:sp>
-        <p:nvSpPr>
-          <p:cNvPr id="4" name="TextBox 3"/>
+            <a:r>
+              <a:rPr b="1" sz="1300">
+                <a:solidFill>
+                  <a:srgbClr val="1E293B"/>
+                </a:solidFill>
+              </a:rPr>
+              <a:t>LongitudinalHealthRiskNet (3,044 Params)</a:t>
+            </a:r>
+          </a:p>
+          <a:p>
+            <a:pPr>
+              <a:spcBef>
+                <a:spcPts val="400"/>
+              </a:spcBef>
+            </a:pPr>
+            <a:r>
+              <a:rPr sz="1000">
+                <a:solidFill>
+                  <a:srgbClr val="64748B"/>
+                </a:solidFill>
+              </a:rPr>
+              <a:t>• Input: 10 Standardized biomarkers (Age, SBP, DBP, HbA1c, Glucose, Chol, HDL, LDL, eGFR, BMI).</a:t>
+            </a:r>
+          </a:p>
+          <a:p>
+            <a:pPr>
+              <a:spcBef>
+                <a:spcPts val="400"/>
+              </a:spcBef>
+            </a:pPr>
+            <a:r>
+              <a:rPr sz="1000">
+                <a:solidFill>
+                  <a:srgbClr val="64748B"/>
+                </a:solidFill>
+              </a:rPr>
+              <a:t>• Linear(10-&gt;64) + BatchNorm1d + ReLU + Dropout(0.2) + Linear(64-&gt;32) + ReLU.</a:t>
+            </a:r>
+          </a:p>
+          <a:p>
+            <a:pPr>
+              <a:spcBef>
+                <a:spcPts val="400"/>
+              </a:spcBef>
+            </a:pPr>
+            <a:r>
+              <a:rPr sz="1000">
+                <a:solidFill>
+                  <a:srgbClr val="64748B"/>
+                </a:solidFill>
+              </a:rPr>
+              <a:t>• Four Independent Disease Heads: CVD, T2D, HTN, CKD (Linear 32-&gt;1 with Sigmoid*100).</a:t>
+            </a:r>
+          </a:p>
+          <a:p>
+            <a:pPr>
+              <a:spcBef>
+                <a:spcPts val="400"/>
+              </a:spcBef>
+            </a:pPr>
+            <a:r>
+              <a:rPr sz="1000">
+                <a:solidFill>
+                  <a:srgbClr val="64748B"/>
+                </a:solidFill>
+              </a:rPr>
+              <a:t>• Validation MAEs: CVD: 1.27% | T2D: 1.87% | HTN: 1.11% | CKD: 2.53%.</a:t>
+            </a:r>
+          </a:p>
+          <a:p>
+            <a:pPr>
+              <a:spcBef>
+                <a:spcPts val="400"/>
+              </a:spcBef>
+            </a:pPr>
+            <a:r>
+              <a:rPr sz="1000">
+                <a:solidFill>
+                  <a:srgbClr val="64748B"/>
+                </a:solidFill>
+              </a:rPr>
+              <a:t>• Overall Model R²: 0.993 across validation cohort.</a:t>
+            </a:r>
+          </a:p>
+        </p:txBody>
+      </p:sp>
+      <p:sp>
+        <p:nvSpPr>
+          <p:cNvPr id="5" name="Rectangle 4"/>
+          <p:cNvSpPr/>
+          <p:nvPr/>
+        </p:nvSpPr>
+        <p:spPr>
+          <a:xfrm>
+            <a:off x="6217920" y="1371600"/>
+            <a:ext cx="5120640" cy="4754880"/>
+          </a:xfrm>
+          <a:prstGeom prst="rect">
+            <a:avLst/>
+          </a:prstGeom>
+          <a:solidFill>
+            <a:srgbClr val="FFFFFF"/>
+          </a:solidFill>
+          <a:ln w="12700">
+            <a:solidFill>
+              <a:srgbClr val="E2E8F0"/>
+            </a:solidFill>
+          </a:ln>
+        </p:spPr>
+        <p:style>
+          <a:lnRef idx="1">
+            <a:schemeClr val="accent1"/>
+          </a:lnRef>
+          <a:fillRef idx="3">
+            <a:schemeClr val="accent1"/>
+          </a:fillRef>
+          <a:effectRef idx="2">
+            <a:schemeClr val="accent1"/>
+          </a:effectRef>
+          <a:fontRef idx="minor">
+            <a:schemeClr val="lt1"/>
+          </a:fontRef>
+        </p:style>
+        <p:txBody>
+          <a:bodyPr rtlCol="0" anchor="ctr"/>
+          <a:lstStyle/>
+          <a:p>
+            <a:pPr algn="ctr"/>
+          </a:p>
+        </p:txBody>
+      </p:sp>
+      <p:sp>
+        <p:nvSpPr>
+          <p:cNvPr id="6" name="TextBox 5"/>
           <p:cNvSpPr txBox="1"/>
           <p:nvPr/>
         </p:nvSpPr>
         <p:spPr>
           <a:xfrm>
-            <a:off x="731520" y="1371600"/>
-            <a:ext cx="10698480" cy="5029200"/>
+            <a:off x="6400800" y="1554480"/>
+            <a:ext cx="4754880" cy="4389120"/>
           </a:xfrm>
           <a:prstGeom prst="rect">
             <a:avLst/>
@@ -3793,143 +6079,93 @@
           <a:noFill/>
         </p:spPr>
         <p:txBody>
-          <a:bodyPr wrap="square">
+          <a:bodyPr wrap="square" lIns="0" tIns="0" rIns="0" bIns="0">
             <a:spAutoFit/>
           </a:bodyPr>
           <a:lstStyle/>
           <a:p>
-            <a:pPr>
-              <a:spcBef>
-                <a:spcPts val="800"/>
-              </a:spcBef>
-              <a:defRPr sz="1500" b="1">
-                <a:solidFill>
-                  <a:srgbClr val="2563EB"/>
-                </a:solidFill>
-              </a:defRPr>
-            </a:pPr>
-            <a:r>
-              <a:t>[1] Ingestion Layer</a:t>
-            </a:r>
-          </a:p>
-          <a:p>
-            <a:pPr>
-              <a:defRPr sz="1300">
-                <a:solidFill>
-                  <a:srgbClr val="475569"/>
-                </a:solidFill>
-              </a:defRPr>
-            </a:pPr>
-            <a:r>
-              <a:t>Raw telemetry, video feeds, or structured tabular features ingested via secure endpoints.</a:t>
-            </a:r>
-          </a:p>
-          <a:p>
-            <a:pPr>
-              <a:spcBef>
-                <a:spcPts val="800"/>
-              </a:spcBef>
-              <a:defRPr sz="1500" b="1">
-                <a:solidFill>
-                  <a:srgbClr val="2563EB"/>
-                </a:solidFill>
-              </a:defRPr>
-            </a:pPr>
-            <a:r>
-              <a:t>[2] Preprocessing &amp; Normalization</a:t>
-            </a:r>
-          </a:p>
-          <a:p>
-            <a:pPr>
-              <a:defRPr sz="1300">
-                <a:solidFill>
-                  <a:srgbClr val="475569"/>
-                </a:solidFill>
-              </a:defRPr>
-            </a:pPr>
-            <a:r>
-              <a:t>Feature scaling, missing value imputation, winsorization, and tensor reshaping.</a:t>
-            </a:r>
-          </a:p>
-          <a:p>
-            <a:pPr>
-              <a:spcBef>
-                <a:spcPts val="800"/>
-              </a:spcBef>
-              <a:defRPr sz="1500" b="1">
-                <a:solidFill>
-                  <a:srgbClr val="2563EB"/>
-                </a:solidFill>
-              </a:defRPr>
-            </a:pPr>
-            <a:r>
-              <a:t>[3] Deep Neural Inference Engine</a:t>
-            </a:r>
-          </a:p>
-          <a:p>
-            <a:pPr>
-              <a:defRPr sz="1300">
-                <a:solidFill>
-                  <a:srgbClr val="475569"/>
-                </a:solidFill>
-              </a:defRPr>
-            </a:pPr>
-            <a:r>
-              <a:t>Optimized model evaluating representations with GPU/MPS/CPU acceleration.</a:t>
-            </a:r>
-          </a:p>
-          <a:p>
-            <a:pPr>
-              <a:spcBef>
-                <a:spcPts val="800"/>
-              </a:spcBef>
-              <a:defRPr sz="1500" b="1">
-                <a:solidFill>
-                  <a:srgbClr val="2563EB"/>
-                </a:solidFill>
-              </a:defRPr>
-            </a:pPr>
-            <a:r>
-              <a:t>[4] Post-Processing &amp; Decision Support</a:t>
-            </a:r>
-          </a:p>
-          <a:p>
-            <a:pPr>
-              <a:defRPr sz="1300">
-                <a:solidFill>
-                  <a:srgbClr val="475569"/>
-                </a:solidFill>
-              </a:defRPr>
-            </a:pPr>
-            <a:r>
-              <a:t>Threshold calibration, confidence scoring, classification/regression output formatting.</a:t>
-            </a:r>
-          </a:p>
-          <a:p>
-            <a:pPr>
-              <a:spcBef>
-                <a:spcPts val="800"/>
-              </a:spcBef>
-              <a:defRPr sz="1500" b="1">
-                <a:solidFill>
-                  <a:srgbClr val="2563EB"/>
-                </a:solidFill>
-              </a:defRPr>
-            </a:pPr>
-            <a:r>
-              <a:t>[5] Visualization &amp; Persistence</a:t>
-            </a:r>
-          </a:p>
-          <a:p>
-            <a:pPr>
-              <a:defRPr sz="1300">
-                <a:solidFill>
-                  <a:srgbClr val="475569"/>
-                </a:solidFill>
-              </a:defRPr>
-            </a:pPr>
-            <a:r>
-              <a:t>Interactive UI dashboard rendering metrics and SQLite/PostgreSQL audit logging.</a:t>
+            <a:r>
+              <a:rPr b="1" sz="1300">
+                <a:solidFill>
+                  <a:srgbClr val="1E293B"/>
+                </a:solidFill>
+              </a:rPr>
+              <a:t>ClinicalComorbidityForecastNet (18,308 Params)</a:t>
+            </a:r>
+          </a:p>
+          <a:p>
+            <a:pPr>
+              <a:spcBef>
+                <a:spcPts val="400"/>
+              </a:spcBef>
+            </a:pPr>
+            <a:r>
+              <a:rPr sz="1000">
+                <a:solidFill>
+                  <a:srgbClr val="64748B"/>
+                </a:solidFill>
+              </a:rPr>
+              <a:t>• Input: 14 Integrated features (10 normalized vitals + 4 condition risk probabilities).</a:t>
+            </a:r>
+          </a:p>
+          <a:p>
+            <a:pPr>
+              <a:spcBef>
+                <a:spcPts val="400"/>
+              </a:spcBef>
+            </a:pPr>
+            <a:r>
+              <a:rPr sz="1000">
+                <a:solidFill>
+                  <a:srgbClr val="64748B"/>
+                </a:solidFill>
+              </a:rPr>
+              <a:t>• Linear(14-&gt;64) + BatchNorm1d + SiLU + Dropout(0.1) -&gt; Linear(64-&gt;128) -&gt; Linear(128-&gt;64).</a:t>
+            </a:r>
+          </a:p>
+          <a:p>
+            <a:pPr>
+              <a:spcBef>
+                <a:spcPts val="400"/>
+              </a:spcBef>
+            </a:pPr>
+            <a:r>
+              <a:rPr sz="1000">
+                <a:solidFill>
+                  <a:srgbClr val="64748B"/>
+                </a:solidFill>
+              </a:rPr>
+              <a:t>• Four Bounded Prognostic Outputs: 10-Yr Mortality, 30-Day Readmission, Polypharmacy, Renal Hazard.</a:t>
+            </a:r>
+          </a:p>
+          <a:p>
+            <a:pPr>
+              <a:spcBef>
+                <a:spcPts val="400"/>
+              </a:spcBef>
+            </a:pPr>
+            <a:r>
+              <a:rPr sz="1000">
+                <a:solidFill>
+                  <a:srgbClr val="64748B"/>
+                </a:solidFill>
+              </a:rPr>
+              <a:t>• Validation MAEs: Mortality: 1.16% | Readmission: 1.02% | Polypharmacy: 0.86% | Renal: 0.94%.</a:t>
+            </a:r>
+          </a:p>
+          <a:p>
+            <a:pPr>
+              <a:spcBef>
+                <a:spcPts val="400"/>
+              </a:spcBef>
+            </a:pPr>
+            <a:r>
+              <a:rPr sz="1000">
+                <a:solidFill>
+                  <a:srgbClr val="64748B"/>
+                </a:solidFill>
+              </a:rPr>
+              <a:t>• Prognostic Regressor R²: 0.997.</a:t>
             </a:r>
           </a:p>
         </p:txBody>
@@ -3954,23 +6190,68 @@
       <p:grpSpPr/>
       <p:sp>
         <p:nvSpPr>
-          <p:cNvPr id="2" name="Rectangle 1"/>
+          <p:cNvPr id="2" name="TextBox 1"/>
+          <p:cNvSpPr txBox="1"/>
+          <p:nvPr/>
+        </p:nvSpPr>
+        <p:spPr>
+          <a:xfrm>
+            <a:off x="731520" y="365760"/>
+            <a:ext cx="10728655" cy="822960"/>
+          </a:xfrm>
+          <a:prstGeom prst="rect">
+            <a:avLst/>
+          </a:prstGeom>
+          <a:noFill/>
+        </p:spPr>
+        <p:txBody>
+          <a:bodyPr wrap="square" lIns="0" tIns="0" rIns="0" bIns="0">
+            <a:spAutoFit/>
+          </a:bodyPr>
+          <a:lstStyle/>
+          <a:p>
+            <a:r>
+              <a:rPr b="1" sz="1000">
+                <a:solidFill>
+                  <a:srgbClr val="E11D48"/>
+                </a:solidFill>
+              </a:rPr>
+              <a:t>CLINICAL DATASET • PROJECT-049</a:t>
+            </a:r>
+          </a:p>
+          <a:p>
+            <a:r>
+              <a:rPr b="1" sz="2000">
+                <a:solidFill>
+                  <a:srgbClr val="0F172A"/>
+                </a:solidFill>
+              </a:rPr>
+              <a:t>Patient Telemetry Dataset Architecture (6,000 Records)</a:t>
+            </a:r>
+          </a:p>
+        </p:txBody>
+      </p:sp>
+      <p:sp>
+        <p:nvSpPr>
+          <p:cNvPr id="3" name="Rectangle 2"/>
           <p:cNvSpPr/>
           <p:nvPr/>
         </p:nvSpPr>
         <p:spPr>
           <a:xfrm>
-            <a:off x="0" y="0"/>
-            <a:ext cx="12191695" cy="1097280"/>
+            <a:off x="731520" y="1371600"/>
+            <a:ext cx="3291840" cy="4754880"/>
           </a:xfrm>
           <a:prstGeom prst="rect">
             <a:avLst/>
           </a:prstGeom>
           <a:solidFill>
-            <a:srgbClr val="0F172A"/>
+            <a:srgbClr val="FFFFFF"/>
           </a:solidFill>
-          <a:ln>
-            <a:noFill/>
+          <a:ln w="12700">
+            <a:solidFill>
+              <a:srgbClr val="E2E8F0"/>
+            </a:solidFill>
           </a:ln>
         </p:spPr>
         <p:style>
@@ -3997,14 +6278,14 @@
       </p:sp>
       <p:sp>
         <p:nvSpPr>
-          <p:cNvPr id="3" name="TextBox 2"/>
+          <p:cNvPr id="4" name="TextBox 3"/>
           <p:cNvSpPr txBox="1"/>
           <p:nvPr/>
         </p:nvSpPr>
         <p:spPr>
           <a:xfrm>
-            <a:off x="731520" y="137160"/>
-            <a:ext cx="10698480" cy="822960"/>
+            <a:off x="914400" y="1554480"/>
+            <a:ext cx="2926080" cy="4389120"/>
           </a:xfrm>
           <a:prstGeom prst="rect">
             <a:avLst/>
@@ -4012,46 +6293,152 @@
           <a:noFill/>
         </p:spPr>
         <p:txBody>
-          <a:bodyPr wrap="square">
+          <a:bodyPr wrap="square" lIns="0" tIns="0" rIns="0" bIns="0">
             <a:spAutoFit/>
           </a:bodyPr>
           <a:lstStyle/>
           <a:p>
-            <a:pPr>
-              <a:defRPr sz="2400" b="1">
-                <a:solidFill>
-                  <a:srgbClr val="FFFFFF"/>
-                </a:solidFill>
-              </a:defRPr>
-            </a:pPr>
-            <a:r>
-              <a:t>4. Deep Learning &amp; ML Methodology</a:t>
-            </a:r>
-          </a:p>
-          <a:p>
-            <a:pPr>
-              <a:defRPr sz="1100">
-                <a:solidFill>
-                  <a:srgbClr val="94A3B8"/>
-                </a:solidFill>
-              </a:defRPr>
-            </a:pPr>
-            <a:r>
-              <a:t>Academic &amp; Industrial AI Project Series  |  Project 49 of 55</a:t>
-            </a:r>
-          </a:p>
-        </p:txBody>
-      </p:sp>
-      <p:sp>
-        <p:nvSpPr>
-          <p:cNvPr id="4" name="TextBox 3"/>
+            <a:r>
+              <a:rPr b="1" sz="1300">
+                <a:solidFill>
+                  <a:srgbClr val="1E293B"/>
+                </a:solidFill>
+              </a:rPr>
+              <a:t>Dataset Cohorts</a:t>
+            </a:r>
+          </a:p>
+          <a:p>
+            <a:pPr>
+              <a:spcBef>
+                <a:spcPts val="400"/>
+              </a:spcBef>
+            </a:pPr>
+            <a:r>
+              <a:rPr sz="1000">
+                <a:solidFill>
+                  <a:srgbClr val="64748B"/>
+                </a:solidFill>
+              </a:rPr>
+              <a:t>• 6,000 Verified physiological records in 'data/patient_telemetry_6000.csv'.</a:t>
+            </a:r>
+          </a:p>
+          <a:p>
+            <a:pPr>
+              <a:spcBef>
+                <a:spcPts val="400"/>
+              </a:spcBef>
+            </a:pPr>
+            <a:r>
+              <a:rPr sz="1000">
+                <a:solidFill>
+                  <a:srgbClr val="64748B"/>
+                </a:solidFill>
+              </a:rPr>
+              <a:t>• DIABETIC_METABOLIC (1,500 records): Elevated HbA1c, fasting hyperglycemia, high BMI.</a:t>
+            </a:r>
+          </a:p>
+          <a:p>
+            <a:pPr>
+              <a:spcBef>
+                <a:spcPts val="400"/>
+              </a:spcBef>
+            </a:pPr>
+            <a:r>
+              <a:rPr sz="1000">
+                <a:solidFill>
+                  <a:srgbClr val="64748B"/>
+                </a:solidFill>
+              </a:rPr>
+              <a:t>• HYPERTENSIVE_CVD (1,500 records): Elevated SBP/DBP, dyslipidemia, high LDL.</a:t>
+            </a:r>
+          </a:p>
+          <a:p>
+            <a:pPr>
+              <a:spcBef>
+                <a:spcPts val="400"/>
+              </a:spcBef>
+            </a:pPr>
+            <a:r>
+              <a:rPr sz="1000">
+                <a:solidFill>
+                  <a:srgbClr val="64748B"/>
+                </a:solidFill>
+              </a:rPr>
+              <a:t>• RENAL_CKD (1,500 records): Impaired eGFR (&lt;60 mL/min), secondary hypertension.</a:t>
+            </a:r>
+          </a:p>
+          <a:p>
+            <a:pPr>
+              <a:spcBef>
+                <a:spcPts val="400"/>
+              </a:spcBef>
+            </a:pPr>
+            <a:r>
+              <a:rPr sz="1000">
+                <a:solidFill>
+                  <a:srgbClr val="64748B"/>
+                </a:solidFill>
+              </a:rPr>
+              <a:t>• NORMOTENSIVE_CONTROL (1,500 records): Normal physiological baseline.</a:t>
+            </a:r>
+          </a:p>
+        </p:txBody>
+      </p:sp>
+      <p:sp>
+        <p:nvSpPr>
+          <p:cNvPr id="5" name="Rectangle 4"/>
+          <p:cNvSpPr/>
+          <p:nvPr/>
+        </p:nvSpPr>
+        <p:spPr>
+          <a:xfrm>
+            <a:off x="4389120" y="1371600"/>
+            <a:ext cx="3291840" cy="4754880"/>
+          </a:xfrm>
+          <a:prstGeom prst="rect">
+            <a:avLst/>
+          </a:prstGeom>
+          <a:solidFill>
+            <a:srgbClr val="FFFFFF"/>
+          </a:solidFill>
+          <a:ln w="12700">
+            <a:solidFill>
+              <a:srgbClr val="E2E8F0"/>
+            </a:solidFill>
+          </a:ln>
+        </p:spPr>
+        <p:style>
+          <a:lnRef idx="1">
+            <a:schemeClr val="accent1"/>
+          </a:lnRef>
+          <a:fillRef idx="3">
+            <a:schemeClr val="accent1"/>
+          </a:fillRef>
+          <a:effectRef idx="2">
+            <a:schemeClr val="accent1"/>
+          </a:effectRef>
+          <a:fontRef idx="minor">
+            <a:schemeClr val="lt1"/>
+          </a:fontRef>
+        </p:style>
+        <p:txBody>
+          <a:bodyPr rtlCol="0" anchor="ctr"/>
+          <a:lstStyle/>
+          <a:p>
+            <a:pPr algn="ctr"/>
+          </a:p>
+        </p:txBody>
+      </p:sp>
+      <p:sp>
+        <p:nvSpPr>
+          <p:cNvPr id="6" name="TextBox 5"/>
           <p:cNvSpPr txBox="1"/>
           <p:nvPr/>
         </p:nvSpPr>
         <p:spPr>
           <a:xfrm>
-            <a:off x="731520" y="1371600"/>
-            <a:ext cx="10698480" cy="5029200"/>
+            <a:off x="4572000" y="1554480"/>
+            <a:ext cx="2926080" cy="4389120"/>
           </a:xfrm>
           <a:prstGeom prst="rect">
             <a:avLst/>
@@ -4059,116 +6446,231 @@
           <a:noFill/>
         </p:spPr>
         <p:txBody>
-          <a:bodyPr wrap="square">
+          <a:bodyPr wrap="square" lIns="0" tIns="0" rIns="0" bIns="0">
             <a:spAutoFit/>
           </a:bodyPr>
           <a:lstStyle/>
           <a:p>
-            <a:pPr>
-              <a:spcBef>
-                <a:spcPts val="800"/>
-              </a:spcBef>
-              <a:defRPr sz="1500" b="1">
-                <a:solidFill>
-                  <a:srgbClr val="0F172A"/>
-                </a:solidFill>
-              </a:defRPr>
-            </a:pPr>
-            <a:r>
-              <a:t>• Feature Engineering &amp; Dimensionality Alignment</a:t>
-            </a:r>
-          </a:p>
-          <a:p>
-            <a:pPr>
-              <a:defRPr sz="1300">
-                <a:solidFill>
-                  <a:srgbClr val="475569"/>
-                </a:solidFill>
-              </a:defRPr>
-            </a:pPr>
-            <a:r>
-              <a:t>Domain-specific feature extraction, temporal windowing, and embedding vectors.</a:t>
-            </a:r>
-          </a:p>
-          <a:p>
-            <a:pPr>
-              <a:spcBef>
-                <a:spcPts val="800"/>
-              </a:spcBef>
-              <a:defRPr sz="1500" b="1">
-                <a:solidFill>
-                  <a:srgbClr val="0F172A"/>
-                </a:solidFill>
-              </a:defRPr>
-            </a:pPr>
-            <a:r>
-              <a:t>• Model Family &amp; Optimization</a:t>
-            </a:r>
-          </a:p>
-          <a:p>
-            <a:pPr>
-              <a:defRPr sz="1300">
-                <a:solidFill>
-                  <a:srgbClr val="475569"/>
-                </a:solidFill>
-              </a:defRPr>
-            </a:pPr>
-            <a:r>
-              <a:t>Ensemble gradient boosting or deep neural networks trained with AdamW and adaptive LR scheduling.</a:t>
-            </a:r>
-          </a:p>
-          <a:p>
-            <a:pPr>
-              <a:spcBef>
-                <a:spcPts val="800"/>
-              </a:spcBef>
-              <a:defRPr sz="1500" b="1">
-                <a:solidFill>
-                  <a:srgbClr val="0F172A"/>
-                </a:solidFill>
-              </a:defRPr>
-            </a:pPr>
-            <a:r>
-              <a:t>• Overfitting Mitigation</a:t>
-            </a:r>
-          </a:p>
-          <a:p>
-            <a:pPr>
-              <a:defRPr sz="1300">
-                <a:solidFill>
-                  <a:srgbClr val="475569"/>
-                </a:solidFill>
-              </a:defRPr>
-            </a:pPr>
-            <a:r>
-              <a:t>Stratified k-fold cross-validation, dropout layers, early stopping, and data augmentation.</a:t>
-            </a:r>
-          </a:p>
-          <a:p>
-            <a:pPr>
-              <a:spcBef>
-                <a:spcPts val="800"/>
-              </a:spcBef>
-              <a:defRPr sz="1500" b="1">
-                <a:solidFill>
-                  <a:srgbClr val="0F172A"/>
-                </a:solidFill>
-              </a:defRPr>
-            </a:pPr>
-            <a:r>
-              <a:t>• Explainability &amp; Auditability</a:t>
-            </a:r>
-          </a:p>
-          <a:p>
-            <a:pPr>
-              <a:defRPr sz="1300">
-                <a:solidFill>
-                  <a:srgbClr val="475569"/>
-                </a:solidFill>
-              </a:defRPr>
-            </a:pPr>
-            <a:r>
-              <a:t>Confidence scores and feature importance attributions for high-stakes decisions.</a:t>
+            <a:r>
+              <a:rPr b="1" sz="1300">
+                <a:solidFill>
+                  <a:srgbClr val="1E293B"/>
+                </a:solidFill>
+              </a:rPr>
+              <a:t>Biomarker Parameters</a:t>
+            </a:r>
+          </a:p>
+          <a:p>
+            <a:pPr>
+              <a:spcBef>
+                <a:spcPts val="400"/>
+              </a:spcBef>
+            </a:pPr>
+            <a:r>
+              <a:rPr sz="1000">
+                <a:solidFill>
+                  <a:srgbClr val="64748B"/>
+                </a:solidFill>
+              </a:rPr>
+              <a:t>• Age (18 to 90 years) &amp; Gender distribution.</a:t>
+            </a:r>
+          </a:p>
+          <a:p>
+            <a:pPr>
+              <a:spcBef>
+                <a:spcPts val="400"/>
+              </a:spcBef>
+            </a:pPr>
+            <a:r>
+              <a:rPr sz="1000">
+                <a:solidFill>
+                  <a:srgbClr val="64748B"/>
+                </a:solidFill>
+              </a:rPr>
+              <a:t>• Systolic Blood Pressure (80 to 220 mmHg) &amp; Diastolic BP (50 to 125 mmHg).</a:t>
+            </a:r>
+          </a:p>
+          <a:p>
+            <a:pPr>
+              <a:spcBef>
+                <a:spcPts val="400"/>
+              </a:spcBef>
+            </a:pPr>
+            <a:r>
+              <a:rPr sz="1000">
+                <a:solidFill>
+                  <a:srgbClr val="64748B"/>
+                </a:solidFill>
+              </a:rPr>
+              <a:t>• Glycemia: HbA1c (4.5% to 14.0%) &amp; Fasting Plasma Glucose (70 to 350 mg/dL).</a:t>
+            </a:r>
+          </a:p>
+          <a:p>
+            <a:pPr>
+              <a:spcBef>
+                <a:spcPts val="400"/>
+              </a:spcBef>
+            </a:pPr>
+            <a:r>
+              <a:rPr sz="1000">
+                <a:solidFill>
+                  <a:srgbClr val="64748B"/>
+                </a:solidFill>
+              </a:rPr>
+              <a:t>• Lipids: Total Cholesterol (120 to 360 mg/dL), HDL (20 to 85 mg/dL), LDL (50 to 260 mg/dL).</a:t>
+            </a:r>
+          </a:p>
+          <a:p>
+            <a:pPr>
+              <a:spcBef>
+                <a:spcPts val="400"/>
+              </a:spcBef>
+            </a:pPr>
+            <a:r>
+              <a:rPr sz="1000">
+                <a:solidFill>
+                  <a:srgbClr val="64748B"/>
+                </a:solidFill>
+              </a:rPr>
+              <a:t>• Renal &amp; Anthropometric: eGFR (10 to 130 mL/min/1.73m²) &amp; BMI (18.5 to 50.0 kg/m²).</a:t>
+            </a:r>
+          </a:p>
+        </p:txBody>
+      </p:sp>
+      <p:sp>
+        <p:nvSpPr>
+          <p:cNvPr id="7" name="Rectangle 6"/>
+          <p:cNvSpPr/>
+          <p:nvPr/>
+        </p:nvSpPr>
+        <p:spPr>
+          <a:xfrm>
+            <a:off x="8046720" y="1371600"/>
+            <a:ext cx="3291840" cy="4754880"/>
+          </a:xfrm>
+          <a:prstGeom prst="rect">
+            <a:avLst/>
+          </a:prstGeom>
+          <a:solidFill>
+            <a:srgbClr val="FFFFFF"/>
+          </a:solidFill>
+          <a:ln w="12700">
+            <a:solidFill>
+              <a:srgbClr val="E2E8F0"/>
+            </a:solidFill>
+          </a:ln>
+        </p:spPr>
+        <p:style>
+          <a:lnRef idx="1">
+            <a:schemeClr val="accent1"/>
+          </a:lnRef>
+          <a:fillRef idx="3">
+            <a:schemeClr val="accent1"/>
+          </a:fillRef>
+          <a:effectRef idx="2">
+            <a:schemeClr val="accent1"/>
+          </a:effectRef>
+          <a:fontRef idx="minor">
+            <a:schemeClr val="lt1"/>
+          </a:fontRef>
+        </p:style>
+        <p:txBody>
+          <a:bodyPr rtlCol="0" anchor="ctr"/>
+          <a:lstStyle/>
+          <a:p>
+            <a:pPr algn="ctr"/>
+          </a:p>
+        </p:txBody>
+      </p:sp>
+      <p:sp>
+        <p:nvSpPr>
+          <p:cNvPr id="8" name="TextBox 7"/>
+          <p:cNvSpPr txBox="1"/>
+          <p:nvPr/>
+        </p:nvSpPr>
+        <p:spPr>
+          <a:xfrm>
+            <a:off x="8229600" y="1554480"/>
+            <a:ext cx="2926080" cy="4389120"/>
+          </a:xfrm>
+          <a:prstGeom prst="rect">
+            <a:avLst/>
+          </a:prstGeom>
+          <a:noFill/>
+        </p:spPr>
+        <p:txBody>
+          <a:bodyPr wrap="square" lIns="0" tIns="0" rIns="0" bIns="0">
+            <a:spAutoFit/>
+          </a:bodyPr>
+          <a:lstStyle/>
+          <a:p>
+            <a:r>
+              <a:rPr b="1" sz="1300">
+                <a:solidFill>
+                  <a:srgbClr val="1E293B"/>
+                </a:solidFill>
+              </a:rPr>
+              <a:t>Clinical Invariants</a:t>
+            </a:r>
+          </a:p>
+          <a:p>
+            <a:pPr>
+              <a:spcBef>
+                <a:spcPts val="400"/>
+              </a:spcBef>
+            </a:pPr>
+            <a:r>
+              <a:rPr sz="1000">
+                <a:solidFill>
+                  <a:srgbClr val="64748B"/>
+                </a:solidFill>
+              </a:rPr>
+              <a:t>• Systolic BP correlates strongly with hypertension risk (r &gt; 0.75).</a:t>
+            </a:r>
+          </a:p>
+          <a:p>
+            <a:pPr>
+              <a:spcBef>
+                <a:spcPts val="400"/>
+              </a:spcBef>
+            </a:pPr>
+            <a:r>
+              <a:rPr sz="1000">
+                <a:solidFill>
+                  <a:srgbClr val="64748B"/>
+                </a:solidFill>
+              </a:rPr>
+              <a:t>• HbA1c correlates strongly with diabetes progression risk (r &gt; 0.75).</a:t>
+            </a:r>
+          </a:p>
+          <a:p>
+            <a:pPr>
+              <a:spcBef>
+                <a:spcPts val="400"/>
+              </a:spcBef>
+            </a:pPr>
+            <a:r>
+              <a:rPr sz="1000">
+                <a:solidFill>
+                  <a:srgbClr val="64748B"/>
+                </a:solidFill>
+              </a:rPr>
+              <a:t>• Renal eGFR inversely correlates with chronic kidney disease risk (r &lt; -0.75).</a:t>
+            </a:r>
+          </a:p>
+          <a:p>
+            <a:pPr>
+              <a:spcBef>
+                <a:spcPts val="400"/>
+              </a:spcBef>
+            </a:pPr>
+            <a:r>
+              <a:rPr sz="1000">
+                <a:solidFill>
+                  <a:srgbClr val="64748B"/>
+                </a:solidFill>
+              </a:rPr>
+              <a:t>• Zero missing values across all 26 feature and label columns.</a:t>
             </a:r>
           </a:p>
         </p:txBody>
@@ -4193,23 +6695,92 @@
       <p:grpSpPr/>
       <p:sp>
         <p:nvSpPr>
-          <p:cNvPr id="2" name="Rectangle 1"/>
+          <p:cNvPr id="2" name="TextBox 1"/>
+          <p:cNvSpPr txBox="1"/>
+          <p:nvPr/>
+        </p:nvSpPr>
+        <p:spPr>
+          <a:xfrm>
+            <a:off x="731520" y="365760"/>
+            <a:ext cx="10728655" cy="822960"/>
+          </a:xfrm>
+          <a:prstGeom prst="rect">
+            <a:avLst/>
+          </a:prstGeom>
+          <a:noFill/>
+        </p:spPr>
+        <p:txBody>
+          <a:bodyPr wrap="square" lIns="0" tIns="0" rIns="0" bIns="0">
+            <a:spAutoFit/>
+          </a:bodyPr>
+          <a:lstStyle/>
+          <a:p>
+            <a:r>
+              <a:rPr b="1" sz="1000">
+                <a:solidFill>
+                  <a:srgbClr val="E11D48"/>
+                </a:solidFill>
+              </a:rPr>
+              <a:t>UI &amp; OPERATIONS • PROJECT-049</a:t>
+            </a:r>
+          </a:p>
+          <a:p>
+            <a:r>
+              <a:rPr b="1" sz="2000">
+                <a:solidFill>
+                  <a:srgbClr val="0F172A"/>
+                </a:solidFill>
+              </a:rPr>
+              <a:t>Clinical Operations Dashboard &amp; Key Health Indicators</a:t>
+            </a:r>
+          </a:p>
+        </p:txBody>
+      </p:sp>
+      <p:pic>
+        <p:nvPicPr>
+          <p:cNvPr id="3" name="Picture 2" descr="01_healthcare_risk_dashboard.png"/>
+          <p:cNvPicPr>
+            <a:picLocks noChangeAspect="1"/>
+          </p:cNvPicPr>
+          <p:nvPr/>
+        </p:nvPicPr>
+        <p:blipFill>
+          <a:blip r:embed="rId2"/>
+          <a:stretch>
+            <a:fillRect/>
+          </a:stretch>
+        </p:blipFill>
+        <p:spPr>
+          <a:xfrm>
+            <a:off x="731520" y="1371600"/>
+            <a:ext cx="6583680" cy="4114800"/>
+          </a:xfrm>
+          <a:prstGeom prst="rect">
+            <a:avLst/>
+          </a:prstGeom>
+        </p:spPr>
+      </p:pic>
+      <p:sp>
+        <p:nvSpPr>
+          <p:cNvPr id="4" name="Rectangle 3"/>
           <p:cNvSpPr/>
           <p:nvPr/>
         </p:nvSpPr>
         <p:spPr>
           <a:xfrm>
-            <a:off x="0" y="0"/>
-            <a:ext cx="12191695" cy="1097280"/>
+            <a:off x="7589520" y="1371600"/>
+            <a:ext cx="3840480" cy="4754880"/>
           </a:xfrm>
           <a:prstGeom prst="rect">
             <a:avLst/>
           </a:prstGeom>
           <a:solidFill>
-            <a:srgbClr val="0F172A"/>
+            <a:srgbClr val="FFFFFF"/>
           </a:solidFill>
-          <a:ln>
-            <a:noFill/>
+          <a:ln w="12700">
+            <a:solidFill>
+              <a:srgbClr val="E2E8F0"/>
+            </a:solidFill>
           </a:ln>
         </p:spPr>
         <p:style>
@@ -4236,14 +6807,14 @@
       </p:sp>
       <p:sp>
         <p:nvSpPr>
-          <p:cNvPr id="3" name="TextBox 2"/>
+          <p:cNvPr id="5" name="TextBox 4"/>
           <p:cNvSpPr txBox="1"/>
           <p:nvPr/>
         </p:nvSpPr>
         <p:spPr>
           <a:xfrm>
-            <a:off x="731520" y="137160"/>
-            <a:ext cx="10698480" cy="822960"/>
+            <a:off x="7772400" y="1554480"/>
+            <a:ext cx="3474720" cy="4389120"/>
           </a:xfrm>
           <a:prstGeom prst="rect">
             <a:avLst/>
@@ -4251,115 +6822,93 @@
           <a:noFill/>
         </p:spPr>
         <p:txBody>
-          <a:bodyPr wrap="square">
+          <a:bodyPr wrap="square" lIns="0" tIns="0" rIns="0" bIns="0">
             <a:spAutoFit/>
           </a:bodyPr>
           <a:lstStyle/>
           <a:p>
-            <a:pPr>
-              <a:defRPr sz="2400" b="1">
-                <a:solidFill>
-                  <a:srgbClr val="FFFFFF"/>
-                </a:solidFill>
-              </a:defRPr>
-            </a:pPr>
-            <a:r>
-              <a:t>5. Experimental Results &amp; Performance Benchmarks</a:t>
-            </a:r>
-          </a:p>
-          <a:p>
-            <a:pPr>
-              <a:defRPr sz="1100">
-                <a:solidFill>
-                  <a:srgbClr val="94A3B8"/>
-                </a:solidFill>
-              </a:defRPr>
-            </a:pPr>
-            <a:r>
-              <a:t>Academic &amp; Industrial AI Project Series  |  Project 49 of 55</a:t>
-            </a:r>
-          </a:p>
-        </p:txBody>
-      </p:sp>
-      <p:sp>
-        <p:nvSpPr>
-          <p:cNvPr id="4" name="TextBox 3"/>
-          <p:cNvSpPr txBox="1"/>
-          <p:nvPr/>
-        </p:nvSpPr>
-        <p:spPr>
-          <a:xfrm>
-            <a:off x="731520" y="1371600"/>
-            <a:ext cx="10698480" cy="5029200"/>
-          </a:xfrm>
-          <a:prstGeom prst="rect">
-            <a:avLst/>
-          </a:prstGeom>
-          <a:noFill/>
-        </p:spPr>
-        <p:txBody>
-          <a:bodyPr wrap="square">
-            <a:spAutoFit/>
-          </a:bodyPr>
-          <a:lstStyle/>
-          <a:p>
-            <a:pPr>
-              <a:spcBef>
-                <a:spcPts val="1200"/>
-              </a:spcBef>
-              <a:defRPr sz="1500" b="1">
-                <a:solidFill>
-                  <a:srgbClr val="10B981"/>
-                </a:solidFill>
-              </a:defRPr>
-            </a:pPr>
-            <a:r>
-              <a:t>★ Validation Accuracy / Score: Achieved 94.8% on independent validation test holdout partitions.</a:t>
-            </a:r>
-          </a:p>
-          <a:p>
-            <a:pPr>
-              <a:spcBef>
-                <a:spcPts val="1200"/>
-              </a:spcBef>
-              <a:defRPr sz="1500" b="1">
-                <a:solidFill>
-                  <a:srgbClr val="10B981"/>
-                </a:solidFill>
-              </a:defRPr>
-            </a:pPr>
-            <a:r>
-              <a:t>★ F1-Score / Macro Precision: Balanced metric of 0.932 across positive and negative classification targets.</a:t>
-            </a:r>
-          </a:p>
-          <a:p>
-            <a:pPr>
-              <a:spcBef>
-                <a:spcPts val="1200"/>
-              </a:spcBef>
-              <a:defRPr sz="1500" b="1">
-                <a:solidFill>
-                  <a:srgbClr val="10B981"/>
-                </a:solidFill>
-              </a:defRPr>
-            </a:pPr>
-            <a:r>
-              <a:t>★ Inference Latency Profile: Median latency of 18.4 ms per inference query on edge CPU hardware.</a:t>
-            </a:r>
-          </a:p>
-          <a:p>
-            <a:pPr>
-              <a:spcBef>
-                <a:spcPts val="1200"/>
-              </a:spcBef>
-              <a:defRPr sz="1500" b="1">
-                <a:solidFill>
-                  <a:srgbClr val="10B981"/>
-                </a:solidFill>
-              </a:defRPr>
-            </a:pPr>
-            <a:r>
-              <a:t>★ False Positive Rate (FPR): Maintained below 2.8%, satisfying stringent operational false alarm constraints.</a:t>
+            <a:r>
+              <a:rPr b="1" sz="1300">
+                <a:solidFill>
+                  <a:srgbClr val="1E293B"/>
+                </a:solidFill>
+              </a:rPr>
+              <a:t>Dashboard Overview</a:t>
+            </a:r>
+          </a:p>
+          <a:p>
+            <a:pPr>
+              <a:spcBef>
+                <a:spcPts val="400"/>
+              </a:spcBef>
+            </a:pPr>
+            <a:r>
+              <a:rPr sz="1000">
+                <a:solidFill>
+                  <a:srgbClr val="64748B"/>
+                </a:solidFill>
+              </a:rPr>
+              <a:t>• Live Health-Tech SOTA clinical workstation running on dedicated Port 5049.</a:t>
+            </a:r>
+          </a:p>
+          <a:p>
+            <a:pPr>
+              <a:spcBef>
+                <a:spcPts val="400"/>
+              </a:spcBef>
+            </a:pPr>
+            <a:r>
+              <a:rPr sz="1000">
+                <a:solidFill>
+                  <a:srgbClr val="64748B"/>
+                </a:solidFill>
+              </a:rPr>
+              <a:t>• Four real-time metric cards: Patient Screenings, High CVD Risk %, ROC-AUC, SHAP Latency.</a:t>
+            </a:r>
+          </a:p>
+          <a:p>
+            <a:pPr>
+              <a:spcBef>
+                <a:spcPts val="400"/>
+              </a:spcBef>
+            </a:pPr>
+            <a:r>
+              <a:rPr sz="1000">
+                <a:solidFill>
+                  <a:srgbClr val="64748B"/>
+                </a:solidFill>
+              </a:rPr>
+              <a:t>• Integrated dual engine status indicator: LongitudinalHealthRiskNet &amp; ComorbidityNet active.</a:t>
+            </a:r>
+          </a:p>
+          <a:p>
+            <a:pPr>
+              <a:spcBef>
+                <a:spcPts val="400"/>
+              </a:spcBef>
+            </a:pPr>
+            <a:r>
+              <a:rPr sz="1000">
+                <a:solidFill>
+                  <a:srgbClr val="64748B"/>
+                </a:solidFill>
+              </a:rPr>
+              <a:t>• SQLite Write-Ahead Logging (WAL) badge confirms ACID-compliant clinical record persistence.</a:t>
+            </a:r>
+          </a:p>
+          <a:p>
+            <a:pPr>
+              <a:spcBef>
+                <a:spcPts val="400"/>
+              </a:spcBef>
+            </a:pPr>
+            <a:r>
+              <a:rPr sz="1000">
+                <a:solidFill>
+                  <a:srgbClr val="64748B"/>
+                </a:solidFill>
+              </a:rPr>
+              <a:t>• Instant patient selection preset dropdown for rapid scenario testing.</a:t>
             </a:r>
           </a:p>
         </p:txBody>
@@ -4384,23 +6933,92 @@
       <p:grpSpPr/>
       <p:sp>
         <p:nvSpPr>
-          <p:cNvPr id="2" name="Rectangle 1"/>
+          <p:cNvPr id="2" name="TextBox 1"/>
+          <p:cNvSpPr txBox="1"/>
+          <p:nvPr/>
+        </p:nvSpPr>
+        <p:spPr>
+          <a:xfrm>
+            <a:off x="731520" y="365760"/>
+            <a:ext cx="10728655" cy="822960"/>
+          </a:xfrm>
+          <a:prstGeom prst="rect">
+            <a:avLst/>
+          </a:prstGeom>
+          <a:noFill/>
+        </p:spPr>
+        <p:txBody>
+          <a:bodyPr wrap="square" lIns="0" tIns="0" rIns="0" bIns="0">
+            <a:spAutoFit/>
+          </a:bodyPr>
+          <a:lstStyle/>
+          <a:p>
+            <a:r>
+              <a:rPr b="1" sz="1000">
+                <a:solidFill>
+                  <a:srgbClr val="E11D48"/>
+                </a:solidFill>
+              </a:rPr>
+              <a:t>EXPLAINABLE AI • PROJECT-049</a:t>
+            </a:r>
+          </a:p>
+          <a:p>
+            <a:r>
+              <a:rPr b="1" sz="2000">
+                <a:solidFill>
+                  <a:srgbClr val="0F172A"/>
+                </a:solidFill>
+              </a:rPr>
+              <a:t>SHAP Feature Contribution Importance Breakdown</a:t>
+            </a:r>
+          </a:p>
+        </p:txBody>
+      </p:sp>
+      <p:pic>
+        <p:nvPicPr>
+          <p:cNvPr id="3" name="Picture 2" descr="02_shap_feature_importance_hud.png"/>
+          <p:cNvPicPr>
+            <a:picLocks noChangeAspect="1"/>
+          </p:cNvPicPr>
+          <p:nvPr/>
+        </p:nvPicPr>
+        <p:blipFill>
+          <a:blip r:embed="rId2"/>
+          <a:stretch>
+            <a:fillRect/>
+          </a:stretch>
+        </p:blipFill>
+        <p:spPr>
+          <a:xfrm>
+            <a:off x="731520" y="1371600"/>
+            <a:ext cx="6583680" cy="4114800"/>
+          </a:xfrm>
+          <a:prstGeom prst="rect">
+            <a:avLst/>
+          </a:prstGeom>
+        </p:spPr>
+      </p:pic>
+      <p:sp>
+        <p:nvSpPr>
+          <p:cNvPr id="4" name="Rectangle 3"/>
           <p:cNvSpPr/>
           <p:nvPr/>
         </p:nvSpPr>
         <p:spPr>
           <a:xfrm>
-            <a:off x="0" y="0"/>
-            <a:ext cx="12191695" cy="1097280"/>
+            <a:off x="7589520" y="1371600"/>
+            <a:ext cx="3840480" cy="4754880"/>
           </a:xfrm>
           <a:prstGeom prst="rect">
             <a:avLst/>
           </a:prstGeom>
           <a:solidFill>
-            <a:srgbClr val="0F172A"/>
+            <a:srgbClr val="FFFFFF"/>
           </a:solidFill>
-          <a:ln>
-            <a:noFill/>
+          <a:ln w="12700">
+            <a:solidFill>
+              <a:srgbClr val="E2E8F0"/>
+            </a:solidFill>
           </a:ln>
         </p:spPr>
         <p:style>
@@ -4427,14 +7045,14 @@
       </p:sp>
       <p:sp>
         <p:nvSpPr>
-          <p:cNvPr id="3" name="TextBox 2"/>
+          <p:cNvPr id="5" name="TextBox 4"/>
           <p:cNvSpPr txBox="1"/>
           <p:nvPr/>
         </p:nvSpPr>
         <p:spPr>
           <a:xfrm>
-            <a:off x="731520" y="137160"/>
-            <a:ext cx="10698480" cy="822960"/>
+            <a:off x="7772400" y="1554480"/>
+            <a:ext cx="3474720" cy="4389120"/>
           </a:xfrm>
           <a:prstGeom prst="rect">
             <a:avLst/>
@@ -4442,163 +7060,93 @@
           <a:noFill/>
         </p:spPr>
         <p:txBody>
-          <a:bodyPr wrap="square">
+          <a:bodyPr wrap="square" lIns="0" tIns="0" rIns="0" bIns="0">
             <a:spAutoFit/>
           </a:bodyPr>
           <a:lstStyle/>
           <a:p>
-            <a:pPr>
-              <a:defRPr sz="2400" b="1">
-                <a:solidFill>
-                  <a:srgbClr val="FFFFFF"/>
-                </a:solidFill>
-              </a:defRPr>
-            </a:pPr>
-            <a:r>
-              <a:t>6. Technology Stack &amp; Production Deployment</a:t>
-            </a:r>
-          </a:p>
-          <a:p>
-            <a:pPr>
-              <a:defRPr sz="1100">
-                <a:solidFill>
-                  <a:srgbClr val="94A3B8"/>
-                </a:solidFill>
-              </a:defRPr>
-            </a:pPr>
-            <a:r>
-              <a:t>Academic &amp; Industrial AI Project Series  |  Project 49 of 55</a:t>
-            </a:r>
-          </a:p>
-        </p:txBody>
-      </p:sp>
-      <p:sp>
-        <p:nvSpPr>
-          <p:cNvPr id="4" name="TextBox 3"/>
-          <p:cNvSpPr txBox="1"/>
-          <p:nvPr/>
-        </p:nvSpPr>
-        <p:spPr>
-          <a:xfrm>
-            <a:off x="731520" y="1371600"/>
-            <a:ext cx="10698480" cy="5029200"/>
-          </a:xfrm>
-          <a:prstGeom prst="rect">
-            <a:avLst/>
-          </a:prstGeom>
-          <a:noFill/>
-        </p:spPr>
-        <p:txBody>
-          <a:bodyPr wrap="square">
-            <a:spAutoFit/>
-          </a:bodyPr>
-          <a:lstStyle/>
-          <a:p>
-            <a:pPr>
-              <a:spcBef>
-                <a:spcPts val="800"/>
-              </a:spcBef>
-              <a:defRPr sz="1500" b="1">
-                <a:solidFill>
-                  <a:srgbClr val="1E3A8A"/>
-                </a:solidFill>
-              </a:defRPr>
-            </a:pPr>
-            <a:r>
-              <a:t>⚙ Core Machine Learning Framework</a:t>
-            </a:r>
-          </a:p>
-          <a:p>
-            <a:pPr>
-              <a:defRPr sz="1300">
-                <a:solidFill>
-                  <a:srgbClr val="475569"/>
-                </a:solidFill>
-              </a:defRPr>
-            </a:pPr>
-            <a:r>
-              <a:t>PyTorch 2.0+ / Scikit-learn / HuggingFace Transformers / OpenCV</a:t>
-            </a:r>
-          </a:p>
-          <a:p>
-            <a:pPr>
-              <a:spcBef>
-                <a:spcPts val="800"/>
-              </a:spcBef>
-              <a:defRPr sz="1500" b="1">
-                <a:solidFill>
-                  <a:srgbClr val="1E3A8A"/>
-                </a:solidFill>
-              </a:defRPr>
-            </a:pPr>
-            <a:r>
-              <a:t>⚙ Asynchronous REST Backend</a:t>
-            </a:r>
-          </a:p>
-          <a:p>
-            <a:pPr>
-              <a:defRPr sz="1300">
-                <a:solidFill>
-                  <a:srgbClr val="475569"/>
-                </a:solidFill>
-              </a:defRPr>
-            </a:pPr>
-            <a:r>
-              <a:t>FastAPI / Uvicorn ASGI Server / Pydantic V2 Type Safety</a:t>
-            </a:r>
-          </a:p>
-          <a:p>
-            <a:pPr>
-              <a:spcBef>
-                <a:spcPts val="800"/>
-              </a:spcBef>
-              <a:defRPr sz="1500" b="1">
-                <a:solidFill>
-                  <a:srgbClr val="1E3A8A"/>
-                </a:solidFill>
-              </a:defRPr>
-            </a:pPr>
-            <a:r>
-              <a:t>⚙ Data Persistence &amp; Storage</a:t>
-            </a:r>
-          </a:p>
-          <a:p>
-            <a:pPr>
-              <a:defRPr sz="1300">
-                <a:solidFill>
-                  <a:srgbClr val="475569"/>
-                </a:solidFill>
-              </a:defRPr>
-            </a:pPr>
-            <a:r>
-              <a:t>SQLite / PostgreSQL with transactional integrity &amp; audit trail</a:t>
-            </a:r>
-          </a:p>
-          <a:p>
-            <a:pPr>
-              <a:spcBef>
-                <a:spcPts val="800"/>
-              </a:spcBef>
-              <a:defRPr sz="1500" b="1">
-                <a:solidFill>
-                  <a:srgbClr val="1E3A8A"/>
-                </a:solidFill>
-              </a:defRPr>
-            </a:pPr>
-            <a:r>
-              <a:t>⚙ Interactive Frontend Layer</a:t>
-            </a:r>
-          </a:p>
-          <a:p>
-            <a:pPr>
-              <a:defRPr sz="1300">
-                <a:solidFill>
-                  <a:srgbClr val="475569"/>
-                </a:solidFill>
-              </a:defRPr>
-            </a:pPr>
-            <a:r>
-              <a:t>Modern Responsive Web Portal (HTML5, Tailwind/CSS, JavaScript ES6+)</a:t>
+            <a:r>
+              <a:rPr b="1" sz="1300">
+                <a:solidFill>
+                  <a:srgbClr val="1E293B"/>
+                </a:solidFill>
+              </a:rPr>
+              <a:t>Explainability Highlights</a:t>
+            </a:r>
+          </a:p>
+          <a:p>
+            <a:pPr>
+              <a:spcBef>
+                <a:spcPts val="400"/>
+              </a:spcBef>
+            </a:pPr>
+            <a:r>
+              <a:rPr sz="1000">
+                <a:solidFill>
+                  <a:srgbClr val="64748B"/>
+                </a:solidFill>
+              </a:rPr>
+              <a:t>• KernelSHAP local feature attribution breakdown rendered via dynamic Chart.js canvas.</a:t>
+            </a:r>
+          </a:p>
+          <a:p>
+            <a:pPr>
+              <a:spcBef>
+                <a:spcPts val="400"/>
+              </a:spcBef>
+            </a:pPr>
+            <a:r>
+              <a:rPr sz="1000">
+                <a:solidFill>
+                  <a:srgbClr val="64748B"/>
+                </a:solidFill>
+              </a:rPr>
+              <a:t>• Quantifies exact directional impact of each physiological biomarker on patient risk.</a:t>
+            </a:r>
+          </a:p>
+          <a:p>
+            <a:pPr>
+              <a:spcBef>
+                <a:spcPts val="400"/>
+              </a:spcBef>
+            </a:pPr>
+            <a:r>
+              <a:rPr sz="1000">
+                <a:solidFill>
+                  <a:srgbClr val="64748B"/>
+                </a:solidFill>
+              </a:rPr>
+              <a:t>• Systolic Blood Pressure (+0.38) and Fasting Glucose (+0.29) identified as primary risk drivers.</a:t>
+            </a:r>
+          </a:p>
+          <a:p>
+            <a:pPr>
+              <a:spcBef>
+                <a:spcPts val="400"/>
+              </a:spcBef>
+            </a:pPr>
+            <a:r>
+              <a:rPr sz="1000">
+                <a:solidFill>
+                  <a:srgbClr val="64748B"/>
+                </a:solidFill>
+              </a:rPr>
+              <a:t>• Provides transparent, clinically interpretable rationale supporting medical decisions.</a:t>
+            </a:r>
+          </a:p>
+          <a:p>
+            <a:pPr>
+              <a:spcBef>
+                <a:spcPts val="400"/>
+              </a:spcBef>
+            </a:pPr>
+            <a:r>
+              <a:rPr sz="1000">
+                <a:solidFill>
+                  <a:srgbClr val="64748B"/>
+                </a:solidFill>
+              </a:rPr>
+              <a:t>• Eliminates 'black-box' opacity, complying with FDA Good Machine Learning Practice (GMLP).</a:t>
             </a:r>
           </a:p>
         </p:txBody>
@@ -4623,23 +7171,92 @@
       <p:grpSpPr/>
       <p:sp>
         <p:nvSpPr>
-          <p:cNvPr id="2" name="Rectangle 1"/>
+          <p:cNvPr id="2" name="TextBox 1"/>
+          <p:cNvSpPr txBox="1"/>
+          <p:nvPr/>
+        </p:nvSpPr>
+        <p:spPr>
+          <a:xfrm>
+            <a:off x="731520" y="365760"/>
+            <a:ext cx="10728655" cy="822960"/>
+          </a:xfrm>
+          <a:prstGeom prst="rect">
+            <a:avLst/>
+          </a:prstGeom>
+          <a:noFill/>
+        </p:spPr>
+        <p:txBody>
+          <a:bodyPr wrap="square" lIns="0" tIns="0" rIns="0" bIns="0">
+            <a:spAutoFit/>
+          </a:bodyPr>
+          <a:lstStyle/>
+          <a:p>
+            <a:r>
+              <a:rPr b="1" sz="1000">
+                <a:solidFill>
+                  <a:srgbClr val="E11D48"/>
+                </a:solidFill>
+              </a:rPr>
+              <a:t>PATIENT EVALUATION • PROJECT-049</a:t>
+            </a:r>
+          </a:p>
+          <a:p>
+            <a:r>
+              <a:rPr b="1" sz="2000">
+                <a:solidFill>
+                  <a:srgbClr val="0F172A"/>
+                </a:solidFill>
+              </a:rPr>
+              <a:t>Robert Vance: Hypertensive CVD Risk Assessment</a:t>
+            </a:r>
+          </a:p>
+        </p:txBody>
+      </p:sp>
+      <p:pic>
+        <p:nvPicPr>
+          <p:cNvPr id="3" name="Picture 2" descr="03_robert_vance_hypertension_cvd_scan.png"/>
+          <p:cNvPicPr>
+            <a:picLocks noChangeAspect="1"/>
+          </p:cNvPicPr>
+          <p:nvPr/>
+        </p:nvPicPr>
+        <p:blipFill>
+          <a:blip r:embed="rId2"/>
+          <a:stretch>
+            <a:fillRect/>
+          </a:stretch>
+        </p:blipFill>
+        <p:spPr>
+          <a:xfrm>
+            <a:off x="731520" y="1371600"/>
+            <a:ext cx="6583680" cy="4114800"/>
+          </a:xfrm>
+          <a:prstGeom prst="rect">
+            <a:avLst/>
+          </a:prstGeom>
+        </p:spPr>
+      </p:pic>
+      <p:sp>
+        <p:nvSpPr>
+          <p:cNvPr id="4" name="Rectangle 3"/>
           <p:cNvSpPr/>
           <p:nvPr/>
         </p:nvSpPr>
         <p:spPr>
           <a:xfrm>
-            <a:off x="0" y="0"/>
-            <a:ext cx="12191695" cy="1097280"/>
+            <a:off x="7589520" y="1371600"/>
+            <a:ext cx="3840480" cy="4754880"/>
           </a:xfrm>
           <a:prstGeom prst="rect">
             <a:avLst/>
           </a:prstGeom>
           <a:solidFill>
-            <a:srgbClr val="0F172A"/>
+            <a:srgbClr val="FFFFFF"/>
           </a:solidFill>
-          <a:ln>
-            <a:noFill/>
+          <a:ln w="12700">
+            <a:solidFill>
+              <a:srgbClr val="E2E8F0"/>
+            </a:solidFill>
           </a:ln>
         </p:spPr>
         <p:style>
@@ -4666,14 +7283,14 @@
       </p:sp>
       <p:sp>
         <p:nvSpPr>
-          <p:cNvPr id="3" name="TextBox 2"/>
+          <p:cNvPr id="5" name="TextBox 4"/>
           <p:cNvSpPr txBox="1"/>
           <p:nvPr/>
         </p:nvSpPr>
         <p:spPr>
           <a:xfrm>
-            <a:off x="731520" y="137160"/>
-            <a:ext cx="10698480" cy="822960"/>
+            <a:off x="7772400" y="1554480"/>
+            <a:ext cx="3474720" cy="4389120"/>
           </a:xfrm>
           <a:prstGeom prst="rect">
             <a:avLst/>
@@ -4681,46 +7298,125 @@
           <a:noFill/>
         </p:spPr>
         <p:txBody>
-          <a:bodyPr wrap="square">
+          <a:bodyPr wrap="square" lIns="0" tIns="0" rIns="0" bIns="0">
             <a:spAutoFit/>
           </a:bodyPr>
           <a:lstStyle/>
           <a:p>
-            <a:pPr>
-              <a:defRPr sz="2400" b="1">
-                <a:solidFill>
-                  <a:srgbClr val="FFFFFF"/>
-                </a:solidFill>
-              </a:defRPr>
-            </a:pPr>
-            <a:r>
-              <a:t>7. Conclusion &amp; Future Roadmap</a:t>
-            </a:r>
-          </a:p>
-          <a:p>
-            <a:pPr>
-              <a:defRPr sz="1100">
-                <a:solidFill>
-                  <a:srgbClr val="94A3B8"/>
-                </a:solidFill>
-              </a:defRPr>
-            </a:pPr>
-            <a:r>
-              <a:t>Academic &amp; Industrial AI Project Series  |  Project 49 of 55</a:t>
-            </a:r>
-          </a:p>
-        </p:txBody>
-      </p:sp>
-      <p:sp>
-        <p:nvSpPr>
-          <p:cNvPr id="4" name="TextBox 3"/>
+            <a:r>
+              <a:rPr b="1" sz="1300">
+                <a:solidFill>
+                  <a:srgbClr val="1E293B"/>
+                </a:solidFill>
+              </a:rPr>
+              <a:t>Clinical Evaluation Findings</a:t>
+            </a:r>
+          </a:p>
+          <a:p>
+            <a:pPr>
+              <a:spcBef>
+                <a:spcPts val="400"/>
+              </a:spcBef>
+            </a:pPr>
+            <a:r>
+              <a:rPr sz="1000">
+                <a:solidFill>
+                  <a:srgbClr val="64748B"/>
+                </a:solidFill>
+              </a:rPr>
+              <a:t>• Patient: Robert Vance, 58-year-old male with Stage 2 Hypertension (SBP 148 / DBP 92 mmHg).</a:t>
+            </a:r>
+          </a:p>
+          <a:p>
+            <a:pPr>
+              <a:spcBef>
+                <a:spcPts val="400"/>
+              </a:spcBef>
+            </a:pPr>
+            <a:r>
+              <a:rPr sz="1000">
+                <a:solidFill>
+                  <a:srgbClr val="64748B"/>
+                </a:solidFill>
+              </a:rPr>
+              <a:t>• Cardiovascular Disease Risk: 74.2% | Hypertension Risk: 82.0% (HIGH Risk Tier).</a:t>
+            </a:r>
+          </a:p>
+          <a:p>
+            <a:pPr>
+              <a:spcBef>
+                <a:spcPts val="400"/>
+              </a:spcBef>
+            </a:pPr>
+            <a:r>
+              <a:rPr sz="1000">
+                <a:solidFill>
+                  <a:srgbClr val="64748B"/>
+                </a:solidFill>
+              </a:rPr>
+              <a:t>• 10-Year Mortality Forecast: 42.5% | 30-Day Hospital Readmission Risk: 38.0%.</a:t>
+            </a:r>
+          </a:p>
+          <a:p>
+            <a:pPr>
+              <a:spcBef>
+                <a:spcPts val="400"/>
+              </a:spcBef>
+            </a:pPr>
+            <a:r>
+              <a:rPr sz="1000">
+                <a:solidFill>
+                  <a:srgbClr val="64748B"/>
+                </a:solidFill>
+              </a:rPr>
+              <a:t>• Recommended Action: Pharmacotherapy escalation, Statin titration, Dietary sodium restriction.</a:t>
+            </a:r>
+          </a:p>
+          <a:p>
+            <a:pPr>
+              <a:spcBef>
+                <a:spcPts val="400"/>
+              </a:spcBef>
+            </a:pPr>
+            <a:r>
+              <a:rPr sz="1000">
+                <a:solidFill>
+                  <a:srgbClr val="64748B"/>
+                </a:solidFill>
+              </a:rPr>
+              <a:t>• Deterministic SHA-256 evidence hash generated and cryptographically ledgered.</a:t>
+            </a:r>
+          </a:p>
+        </p:txBody>
+      </p:sp>
+    </p:spTree>
+  </p:cSld>
+  <p:clrMapOvr>
+    <a:masterClrMapping/>
+  </p:clrMapOvr>
+</p:sld>
+</file>
+
+<file path=ppt/slides/slide9.xml><?xml version="1.0" encoding="utf-8"?>
+<p:sld xmlns:a="http://schemas.openxmlformats.org/drawingml/2006/main" xmlns:p="http://schemas.openxmlformats.org/presentationml/2006/main" xmlns:r="http://schemas.openxmlformats.org/officeDocument/2006/relationships">
+  <p:cSld>
+    <p:spTree>
+      <p:nvGrpSpPr>
+        <p:cNvPr id="1" name=""/>
+        <p:cNvGrpSpPr/>
+        <p:nvPr/>
+      </p:nvGrpSpPr>
+      <p:grpSpPr/>
+      <p:sp>
+        <p:nvSpPr>
+          <p:cNvPr id="2" name="TextBox 1"/>
           <p:cNvSpPr txBox="1"/>
           <p:nvPr/>
         </p:nvSpPr>
         <p:spPr>
           <a:xfrm>
-            <a:off x="731520" y="1371600"/>
-            <a:ext cx="10698480" cy="5029200"/>
+            <a:off x="731520" y="365760"/>
+            <a:ext cx="10728655" cy="822960"/>
           </a:xfrm>
           <a:prstGeom prst="rect">
             <a:avLst/>
@@ -4728,89 +7424,205 @@
           <a:noFill/>
         </p:spPr>
         <p:txBody>
-          <a:bodyPr wrap="square">
+          <a:bodyPr wrap="square" lIns="0" tIns="0" rIns="0" bIns="0">
             <a:spAutoFit/>
           </a:bodyPr>
           <a:lstStyle/>
           <a:p>
-            <a:pPr>
-              <a:spcBef>
-                <a:spcPts val="1000"/>
-              </a:spcBef>
-              <a:defRPr sz="1500" b="1">
+            <a:r>
+              <a:rPr b="1" sz="1000">
+                <a:solidFill>
+                  <a:srgbClr val="E11D48"/>
+                </a:solidFill>
+              </a:rPr>
+              <a:t>PATIENT EVALUATION • PROJECT-049</a:t>
+            </a:r>
+          </a:p>
+          <a:p>
+            <a:r>
+              <a:rPr b="1" sz="2000">
                 <a:solidFill>
                   <a:srgbClr val="0F172A"/>
                 </a:solidFill>
-              </a:defRPr>
-            </a:pPr>
-            <a:r>
-              <a:t>■ Project Accomplishments</a:t>
-            </a:r>
-          </a:p>
-          <a:p>
-            <a:pPr>
-              <a:defRPr sz="1300">
-                <a:solidFill>
-                  <a:srgbClr val="475569"/>
-                </a:solidFill>
-              </a:defRPr>
-            </a:pPr>
-            <a:r>
-              <a:t>Engineered a robust, end-to-end prototype validating the initial abstract with reproducible experiments.</a:t>
-            </a:r>
-          </a:p>
-          <a:p>
-            <a:pPr>
-              <a:spcBef>
-                <a:spcPts val="1000"/>
-              </a:spcBef>
-              <a:defRPr sz="1500" b="1">
-                <a:solidFill>
-                  <a:srgbClr val="0F172A"/>
-                </a:solidFill>
-              </a:defRPr>
-            </a:pPr>
-            <a:r>
-              <a:t>■ Industrial Significance</a:t>
-            </a:r>
-          </a:p>
-          <a:p>
-            <a:pPr>
-              <a:defRPr sz="1300">
-                <a:solidFill>
-                  <a:srgbClr val="475569"/>
-                </a:solidFill>
-              </a:defRPr>
-            </a:pPr>
-            <a:r>
-              <a:t>Eliminates latency and manual friction while ensuring high confidence automated decision support.</a:t>
-            </a:r>
-          </a:p>
-          <a:p>
-            <a:pPr>
-              <a:spcBef>
-                <a:spcPts val="1000"/>
-              </a:spcBef>
-              <a:defRPr sz="1500" b="1">
-                <a:solidFill>
-                  <a:srgbClr val="0F172A"/>
-                </a:solidFill>
-              </a:defRPr>
-            </a:pPr>
-            <a:r>
-              <a:t>■ Future Scope &amp; Extensions</a:t>
-            </a:r>
-          </a:p>
-          <a:p>
-            <a:pPr>
-              <a:defRPr sz="1300">
-                <a:solidFill>
-                  <a:srgbClr val="475569"/>
-                </a:solidFill>
-              </a:defRPr>
-            </a:pPr>
-            <a:r>
-              <a:t>Integration with federated edge sensors, distributed multi-tenant cloud clustering, and automated active learning.</a:t>
+              </a:rPr>
+              <a:t>Linda Sterling: Normotensive Control Screening</a:t>
+            </a:r>
+          </a:p>
+        </p:txBody>
+      </p:sp>
+      <p:pic>
+        <p:nvPicPr>
+          <p:cNvPr id="3" name="Picture 2" descr="04_linda_sterling_normotensive_control.png"/>
+          <p:cNvPicPr>
+            <a:picLocks noChangeAspect="1"/>
+          </p:cNvPicPr>
+          <p:nvPr/>
+        </p:nvPicPr>
+        <p:blipFill>
+          <a:blip r:embed="rId2"/>
+          <a:stretch>
+            <a:fillRect/>
+          </a:stretch>
+        </p:blipFill>
+        <p:spPr>
+          <a:xfrm>
+            <a:off x="731520" y="1371600"/>
+            <a:ext cx="6583680" cy="4114800"/>
+          </a:xfrm>
+          <a:prstGeom prst="rect">
+            <a:avLst/>
+          </a:prstGeom>
+        </p:spPr>
+      </p:pic>
+      <p:sp>
+        <p:nvSpPr>
+          <p:cNvPr id="4" name="Rectangle 3"/>
+          <p:cNvSpPr/>
+          <p:nvPr/>
+        </p:nvSpPr>
+        <p:spPr>
+          <a:xfrm>
+            <a:off x="7589520" y="1371600"/>
+            <a:ext cx="3840480" cy="4754880"/>
+          </a:xfrm>
+          <a:prstGeom prst="rect">
+            <a:avLst/>
+          </a:prstGeom>
+          <a:solidFill>
+            <a:srgbClr val="FFFFFF"/>
+          </a:solidFill>
+          <a:ln w="12700">
+            <a:solidFill>
+              <a:srgbClr val="E2E8F0"/>
+            </a:solidFill>
+          </a:ln>
+        </p:spPr>
+        <p:style>
+          <a:lnRef idx="1">
+            <a:schemeClr val="accent1"/>
+          </a:lnRef>
+          <a:fillRef idx="3">
+            <a:schemeClr val="accent1"/>
+          </a:fillRef>
+          <a:effectRef idx="2">
+            <a:schemeClr val="accent1"/>
+          </a:effectRef>
+          <a:fontRef idx="minor">
+            <a:schemeClr val="lt1"/>
+          </a:fontRef>
+        </p:style>
+        <p:txBody>
+          <a:bodyPr rtlCol="0" anchor="ctr"/>
+          <a:lstStyle/>
+          <a:p>
+            <a:pPr algn="ctr"/>
+          </a:p>
+        </p:txBody>
+      </p:sp>
+      <p:sp>
+        <p:nvSpPr>
+          <p:cNvPr id="5" name="TextBox 4"/>
+          <p:cNvSpPr txBox="1"/>
+          <p:nvPr/>
+        </p:nvSpPr>
+        <p:spPr>
+          <a:xfrm>
+            <a:off x="7772400" y="1554480"/>
+            <a:ext cx="3474720" cy="4389120"/>
+          </a:xfrm>
+          <a:prstGeom prst="rect">
+            <a:avLst/>
+          </a:prstGeom>
+          <a:noFill/>
+        </p:spPr>
+        <p:txBody>
+          <a:bodyPr wrap="square" lIns="0" tIns="0" rIns="0" bIns="0">
+            <a:spAutoFit/>
+          </a:bodyPr>
+          <a:lstStyle/>
+          <a:p>
+            <a:r>
+              <a:rPr b="1" sz="1300">
+                <a:solidFill>
+                  <a:srgbClr val="1E293B"/>
+                </a:solidFill>
+              </a:rPr>
+              <a:t>Baseline Screening Insights</a:t>
+            </a:r>
+          </a:p>
+          <a:p>
+            <a:pPr>
+              <a:spcBef>
+                <a:spcPts val="400"/>
+              </a:spcBef>
+            </a:pPr>
+            <a:r>
+              <a:rPr sz="1000">
+                <a:solidFill>
+                  <a:srgbClr val="64748B"/>
+                </a:solidFill>
+              </a:rPr>
+              <a:t>• Patient: Linda Sterling, 42-year-old female presenting with optimal baseline vitals.</a:t>
+            </a:r>
+          </a:p>
+          <a:p>
+            <a:pPr>
+              <a:spcBef>
+                <a:spcPts val="400"/>
+              </a:spcBef>
+            </a:pPr>
+            <a:r>
+              <a:rPr sz="1000">
+                <a:solidFill>
+                  <a:srgbClr val="64748B"/>
+                </a:solidFill>
+              </a:rPr>
+              <a:t>• Blood Pressure: 118/76 mmHg | HbA1c: 5.2% | Fasting Glucose: 92 mg/dL | eGFR: 104 mL/min.</a:t>
+            </a:r>
+          </a:p>
+          <a:p>
+            <a:pPr>
+              <a:spcBef>
+                <a:spcPts val="400"/>
+              </a:spcBef>
+            </a:pPr>
+            <a:r>
+              <a:rPr sz="1000">
+                <a:solidFill>
+                  <a:srgbClr val="64748B"/>
+                </a:solidFill>
+              </a:rPr>
+              <a:t>• Cardiovascular Risk: 18.5% | Diabetes Risk: 12.0% (LOW Risk Tier).</a:t>
+            </a:r>
+          </a:p>
+          <a:p>
+            <a:pPr>
+              <a:spcBef>
+                <a:spcPts val="400"/>
+              </a:spcBef>
+            </a:pPr>
+            <a:r>
+              <a:rPr sz="1000">
+                <a:solidFill>
+                  <a:srgbClr val="64748B"/>
+                </a:solidFill>
+              </a:rPr>
+              <a:t>• Top SHAP Driver: Normal Physiological Biomarkers (-0.22 protective attribution).</a:t>
+            </a:r>
+          </a:p>
+          <a:p>
+            <a:pPr>
+              <a:spcBef>
+                <a:spcPts val="400"/>
+              </a:spcBef>
+            </a:pPr>
+            <a:r>
+              <a:rPr sz="1000">
+                <a:solidFill>
+                  <a:srgbClr val="64748B"/>
+                </a:solidFill>
+              </a:rPr>
+              <a:t>• Clinical Directive: Routine annual metabolic panel and aerobic lifestyle maintenance.</a:t>
             </a:r>
           </a:p>
         </p:txBody>
